--- a/pptx-asset-library/decks/04_compare/CMP_scorecard_v2.pptx
+++ b/pptx-asset-library/decks/04_compare/CMP_scorecard_v2.pptx
@@ -3126,837 +3126,822 @@
           </a:p>
         </p:txBody>
       </p:sp>
-      <p:grpSp>
-        <p:nvGrpSpPr>
-          <p:cNvPr id="6" name="asset:CMP-014"/>
-          <p:cNvGrpSpPr/>
+      <p:sp>
+        <p:nvSpPr>
+          <p:cNvPr id="3" name="TextBox 2"/>
+          <p:cNvSpPr txBox="1"/>
           <p:nvPr/>
-        </p:nvGrpSpPr>
-        <p:grpSpPr>
+        </p:nvSpPr>
+        <p:spPr>
           <a:xfrm>
             <a:off x="502920" y="475488"/>
-            <a:ext cx="11155680" cy="4919472"/>
-            <a:chOff x="502920" y="475488"/>
-            <a:chExt cx="11155680" cy="4919472"/>
+            <a:ext cx="11155680" cy="457200"/>
           </a:xfrm>
-        </p:grpSpPr>
-        <p:sp>
-          <p:nvSpPr>
-            <p:cNvPr id="3" name="TextBox 2"/>
-            <p:cNvSpPr txBox="1"/>
-            <p:nvPr/>
-          </p:nvSpPr>
-          <p:spPr>
-            <a:xfrm>
-              <a:off x="502920" y="475488"/>
-              <a:ext cx="11155680" cy="457200"/>
-            </a:xfrm>
-            <a:prstGeom prst="rect">
-              <a:avLst/>
-            </a:prstGeom>
-            <a:noFill/>
-          </p:spPr>
-          <p:txBody>
-            <a:bodyPr wrap="square" anchor="ctr" lIns="38100" rIns="38100" tIns="25400" bIns="25400">
-              <a:spAutoFit/>
-            </a:bodyPr>
-            <a:lstStyle/>
-            <a:p>
-              <a:pPr algn="l"/>
-              <a:r>
-                <a:rPr sz="1800" b="1">
-                  <a:solidFill>
-                    <a:srgbClr val="1F3864"/>
-                  </a:solidFill>
-                  <a:latin typeface="Pretendard"/>
-                  <a:ea typeface="Pretendard"/>
-                  <a:cs typeface="Pretendard"/>
-                </a:rPr>
-                <a:t>가중치 스코어카드 (환산점수)</a:t>
-              </a:r>
-            </a:p>
-          </p:txBody>
-        </p:sp>
-        <p:sp>
-          <p:nvSpPr>
-            <p:cNvPr id="4" name="TextBox 3"/>
-            <p:cNvSpPr txBox="1"/>
-            <p:nvPr/>
-          </p:nvSpPr>
-          <p:spPr>
-            <a:xfrm>
-              <a:off x="502920" y="932688"/>
-              <a:ext cx="11155680" cy="292608"/>
-            </a:xfrm>
-            <a:prstGeom prst="rect">
-              <a:avLst/>
-            </a:prstGeom>
-            <a:noFill/>
-          </p:spPr>
-          <p:txBody>
-            <a:bodyPr wrap="square" anchor="ctr" lIns="38100" rIns="38100" tIns="25400" bIns="25400">
-              <a:spAutoFit/>
-            </a:bodyPr>
-            <a:lstStyle/>
-            <a:p>
-              <a:pPr algn="l"/>
-              <a:r>
-                <a:rPr sz="1100" b="0">
-                  <a:solidFill>
-                    <a:srgbClr val="595959"/>
-                  </a:solidFill>
-                  <a:latin typeface="Pretendard"/>
-                  <a:ea typeface="Pretendard"/>
-                  <a:cs typeface="Pretendard"/>
-                </a:rPr>
-                <a:t>항목별 가중치 × 점수 = 환산점수, 종합 환산점수 합산</a:t>
-              </a:r>
-            </a:p>
-          </p:txBody>
-        </p:sp>
-        <p:graphicFrame>
-          <p:nvGraphicFramePr>
-            <p:cNvPr id="5" name="CMP-014_bg"/>
-            <p:cNvGraphicFramePr>
-              <a:graphicFrameLocks noGrp="1"/>
-            </p:cNvGraphicFramePr>
-            <p:nvPr/>
-          </p:nvGraphicFramePr>
-          <p:xfrm>
-            <a:off x="1463040" y="1554480"/>
-            <a:ext cx="9235440" cy="3840480"/>
-          </p:xfrm>
-          <a:graphic>
-            <a:graphicData uri="http://schemas.openxmlformats.org/drawingml/2006/table">
-              <a:tbl>
-                <a:tblPr>
-                  <a:tableStyleId>{5C22544A-7EE6-4342-B048-85BDC9FD1C3A}</a:tableStyleId>
-                </a:tblPr>
-                <a:tblGrid>
-                  <a:gridCol w="3931920"/>
-                  <a:gridCol w="1737360"/>
-                  <a:gridCol w="1737360"/>
-                  <a:gridCol w="1828800"/>
-                </a:tblGrid>
-                <a:tr h="548640">
-                  <a:tc>
-                    <a:txBody>
-                      <a:bodyPr wrap="square"/>
-                      <a:lstStyle/>
-                      <a:p>
-                        <a:pPr algn="l"/>
-                        <a:r>
-                          <a:rPr sz="1200" b="1">
-                            <a:solidFill>
-                              <a:srgbClr val="FFFFFF"/>
-                            </a:solidFill>
-                            <a:latin typeface="Pretendard"/>
-                            <a:ea typeface="Pretendard"/>
-                            <a:cs typeface="Pretendard"/>
-                          </a:rPr>
-                          <a:t>평가 항목</a:t>
-                        </a:r>
-                      </a:p>
-                    </a:txBody>
-                    <a:tcPr anchor="ctr" marL="63500" marR="63500" marT="38100" marB="38100">
-                      <a:solidFill>
-                        <a:srgbClr val="1F3864"/>
-                      </a:solidFill>
-                    </a:tcPr>
-                  </a:tc>
-                  <a:tc>
-                    <a:txBody>
-                      <a:bodyPr wrap="square"/>
-                      <a:lstStyle/>
-                      <a:p>
-                        <a:pPr algn="ctr"/>
-                        <a:r>
-                          <a:rPr sz="1200" b="1">
-                            <a:solidFill>
-                              <a:srgbClr val="FFFFFF"/>
-                            </a:solidFill>
-                            <a:latin typeface="Pretendard"/>
-                            <a:ea typeface="Pretendard"/>
-                            <a:cs typeface="Pretendard"/>
-                          </a:rPr>
-                          <a:t>가중치</a:t>
-                        </a:r>
-                      </a:p>
-                    </a:txBody>
-                    <a:tcPr anchor="ctr" marL="63500" marR="63500" marT="38100" marB="38100">
-                      <a:solidFill>
-                        <a:srgbClr val="1F3864"/>
-                      </a:solidFill>
-                    </a:tcPr>
-                  </a:tc>
-                  <a:tc>
-                    <a:txBody>
-                      <a:bodyPr wrap="square"/>
-                      <a:lstStyle/>
-                      <a:p>
-                        <a:pPr algn="ctr"/>
-                        <a:r>
-                          <a:rPr sz="1200" b="1">
-                            <a:solidFill>
-                              <a:srgbClr val="FFFFFF"/>
-                            </a:solidFill>
-                            <a:latin typeface="Pretendard"/>
-                            <a:ea typeface="Pretendard"/>
-                            <a:cs typeface="Pretendard"/>
-                          </a:rPr>
-                          <a:t>점수(/100)</a:t>
-                        </a:r>
-                      </a:p>
-                    </a:txBody>
-                    <a:tcPr anchor="ctr" marL="63500" marR="63500" marT="38100" marB="38100">
-                      <a:solidFill>
-                        <a:srgbClr val="1F3864"/>
-                      </a:solidFill>
-                    </a:tcPr>
-                  </a:tc>
-                  <a:tc>
-                    <a:txBody>
-                      <a:bodyPr wrap="square"/>
-                      <a:lstStyle/>
-                      <a:p>
-                        <a:pPr algn="ctr"/>
-                        <a:r>
-                          <a:rPr sz="1200" b="1">
-                            <a:solidFill>
-                              <a:srgbClr val="FFFFFF"/>
-                            </a:solidFill>
-                            <a:latin typeface="Pretendard"/>
-                            <a:ea typeface="Pretendard"/>
-                            <a:cs typeface="Pretendard"/>
-                          </a:rPr>
-                          <a:t>환산점수</a:t>
-                        </a:r>
-                      </a:p>
-                    </a:txBody>
-                    <a:tcPr anchor="ctr" marL="63500" marR="63500" marT="38100" marB="38100">
-                      <a:solidFill>
-                        <a:srgbClr val="1F3864"/>
-                      </a:solidFill>
-                    </a:tcPr>
-                  </a:tc>
-                </a:tr>
-                <a:tr h="548640">
-                  <a:tc>
-                    <a:txBody>
-                      <a:bodyPr wrap="square"/>
-                      <a:lstStyle/>
-                      <a:p>
-                        <a:pPr algn="l"/>
-                        <a:r>
-                          <a:rPr sz="1100" b="1">
-                            <a:solidFill>
-                              <a:srgbClr val="222222"/>
-                            </a:solidFill>
-                            <a:latin typeface="Pretendard"/>
-                            <a:ea typeface="Pretendard"/>
-                            <a:cs typeface="Pretendard"/>
-                          </a:rPr>
-                          <a:t>글로벌 역량</a:t>
-                        </a:r>
-                      </a:p>
-                    </a:txBody>
-                    <a:tcPr anchor="ctr" marL="63500" marR="63500" marT="38100" marB="38100">
-                      <a:solidFill>
-                        <a:srgbClr val="FFFFFF"/>
-                      </a:solidFill>
-                    </a:tcPr>
-                  </a:tc>
-                  <a:tc>
-                    <a:txBody>
-                      <a:bodyPr wrap="square"/>
-                      <a:lstStyle/>
-                      <a:p>
-                        <a:pPr algn="ctr"/>
-                        <a:r>
-                          <a:rPr sz="1100" b="0">
-                            <a:solidFill>
-                              <a:srgbClr val="595959"/>
-                            </a:solidFill>
-                            <a:latin typeface="Pretendard"/>
-                            <a:ea typeface="Pretendard"/>
-                            <a:cs typeface="Pretendard"/>
-                          </a:rPr>
-                          <a:t>30%</a:t>
-                        </a:r>
-                      </a:p>
-                    </a:txBody>
-                    <a:tcPr anchor="ctr" marL="63500" marR="63500" marT="38100" marB="38100">
-                      <a:solidFill>
-                        <a:srgbClr val="FFFFFF"/>
-                      </a:solidFill>
-                    </a:tcPr>
-                  </a:tc>
-                  <a:tc>
-                    <a:txBody>
-                      <a:bodyPr wrap="square"/>
-                      <a:lstStyle/>
-                      <a:p>
-                        <a:pPr algn="ctr"/>
-                        <a:r>
-                          <a:rPr sz="1100" b="0">
-                            <a:solidFill>
-                              <a:srgbClr val="222222"/>
-                            </a:solidFill>
-                            <a:latin typeface="Pretendard"/>
-                            <a:ea typeface="Pretendard"/>
-                            <a:cs typeface="Pretendard"/>
-                          </a:rPr>
-                          <a:t>90</a:t>
-                        </a:r>
-                      </a:p>
-                    </a:txBody>
-                    <a:tcPr anchor="ctr" marL="63500" marR="63500" marT="38100" marB="38100">
-                      <a:solidFill>
-                        <a:srgbClr val="FFFFFF"/>
-                      </a:solidFill>
-                    </a:tcPr>
-                  </a:tc>
-                  <a:tc>
-                    <a:txBody>
-                      <a:bodyPr wrap="square"/>
-                      <a:lstStyle/>
-                      <a:p>
-                        <a:pPr algn="ctr"/>
-                        <a:r>
-                          <a:rPr sz="1100" b="1">
-                            <a:solidFill>
-                              <a:srgbClr val="2E75D6"/>
-                            </a:solidFill>
-                            <a:latin typeface="Pretendard"/>
-                            <a:ea typeface="Pretendard"/>
-                            <a:cs typeface="Pretendard"/>
-                          </a:rPr>
-                          <a:t>27.0</a:t>
-                        </a:r>
-                      </a:p>
-                    </a:txBody>
-                    <a:tcPr anchor="ctr" marL="63500" marR="63500" marT="38100" marB="38100">
-                      <a:solidFill>
-                        <a:srgbClr val="F7F9FC"/>
-                      </a:solidFill>
-                    </a:tcPr>
-                  </a:tc>
-                </a:tr>
-                <a:tr h="548640">
-                  <a:tc>
-                    <a:txBody>
-                      <a:bodyPr wrap="square"/>
-                      <a:lstStyle/>
-                      <a:p>
-                        <a:pPr algn="l"/>
-                        <a:r>
-                          <a:rPr sz="1100" b="1">
-                            <a:solidFill>
-                              <a:srgbClr val="222222"/>
-                            </a:solidFill>
-                            <a:latin typeface="Pretendard"/>
-                            <a:ea typeface="Pretendard"/>
-                            <a:cs typeface="Pretendard"/>
-                          </a:rPr>
-                          <a:t>협업 역량</a:t>
-                        </a:r>
-                      </a:p>
-                    </a:txBody>
-                    <a:tcPr anchor="ctr" marL="63500" marR="63500" marT="38100" marB="38100">
-                      <a:solidFill>
-                        <a:srgbClr val="F2F2F2"/>
-                      </a:solidFill>
-                    </a:tcPr>
-                  </a:tc>
-                  <a:tc>
-                    <a:txBody>
-                      <a:bodyPr wrap="square"/>
-                      <a:lstStyle/>
-                      <a:p>
-                        <a:pPr algn="ctr"/>
-                        <a:r>
-                          <a:rPr sz="1100" b="0">
-                            <a:solidFill>
-                              <a:srgbClr val="595959"/>
-                            </a:solidFill>
-                            <a:latin typeface="Pretendard"/>
-                            <a:ea typeface="Pretendard"/>
-                            <a:cs typeface="Pretendard"/>
-                          </a:rPr>
-                          <a:t>20%</a:t>
-                        </a:r>
-                      </a:p>
-                    </a:txBody>
-                    <a:tcPr anchor="ctr" marL="63500" marR="63500" marT="38100" marB="38100">
-                      <a:solidFill>
-                        <a:srgbClr val="F2F2F2"/>
-                      </a:solidFill>
-                    </a:tcPr>
-                  </a:tc>
-                  <a:tc>
-                    <a:txBody>
-                      <a:bodyPr wrap="square"/>
-                      <a:lstStyle/>
-                      <a:p>
-                        <a:pPr algn="ctr"/>
-                        <a:r>
-                          <a:rPr sz="1100" b="0">
-                            <a:solidFill>
-                              <a:srgbClr val="222222"/>
-                            </a:solidFill>
-                            <a:latin typeface="Pretendard"/>
-                            <a:ea typeface="Pretendard"/>
-                            <a:cs typeface="Pretendard"/>
-                          </a:rPr>
-                          <a:t>88</a:t>
-                        </a:r>
-                      </a:p>
-                    </a:txBody>
-                    <a:tcPr anchor="ctr" marL="63500" marR="63500" marT="38100" marB="38100">
-                      <a:solidFill>
-                        <a:srgbClr val="F2F2F2"/>
-                      </a:solidFill>
-                    </a:tcPr>
-                  </a:tc>
-                  <a:tc>
-                    <a:txBody>
-                      <a:bodyPr wrap="square"/>
-                      <a:lstStyle/>
-                      <a:p>
-                        <a:pPr algn="ctr"/>
-                        <a:r>
-                          <a:rPr sz="1100" b="1">
-                            <a:solidFill>
-                              <a:srgbClr val="2E75D6"/>
-                            </a:solidFill>
-                            <a:latin typeface="Pretendard"/>
-                            <a:ea typeface="Pretendard"/>
-                            <a:cs typeface="Pretendard"/>
-                          </a:rPr>
-                          <a:t>17.6</a:t>
-                        </a:r>
-                      </a:p>
-                    </a:txBody>
-                    <a:tcPr anchor="ctr" marL="63500" marR="63500" marT="38100" marB="38100">
-                      <a:solidFill>
-                        <a:srgbClr val="F7F9FC"/>
-                      </a:solidFill>
-                    </a:tcPr>
-                  </a:tc>
-                </a:tr>
-                <a:tr h="548640">
-                  <a:tc>
-                    <a:txBody>
-                      <a:bodyPr wrap="square"/>
-                      <a:lstStyle/>
-                      <a:p>
-                        <a:pPr algn="l"/>
-                        <a:r>
-                          <a:rPr sz="1100" b="1">
-                            <a:solidFill>
-                              <a:srgbClr val="222222"/>
-                            </a:solidFill>
-                            <a:latin typeface="Pretendard"/>
-                            <a:ea typeface="Pretendard"/>
-                            <a:cs typeface="Pretendard"/>
-                          </a:rPr>
-                          <a:t>AI 활용도</a:t>
-                        </a:r>
-                      </a:p>
-                    </a:txBody>
-                    <a:tcPr anchor="ctr" marL="63500" marR="63500" marT="38100" marB="38100">
-                      <a:solidFill>
-                        <a:srgbClr val="FFFFFF"/>
-                      </a:solidFill>
-                    </a:tcPr>
-                  </a:tc>
-                  <a:tc>
-                    <a:txBody>
-                      <a:bodyPr wrap="square"/>
-                      <a:lstStyle/>
-                      <a:p>
-                        <a:pPr algn="ctr"/>
-                        <a:r>
-                          <a:rPr sz="1100" b="0">
-                            <a:solidFill>
-                              <a:srgbClr val="595959"/>
-                            </a:solidFill>
-                            <a:latin typeface="Pretendard"/>
-                            <a:ea typeface="Pretendard"/>
-                            <a:cs typeface="Pretendard"/>
-                          </a:rPr>
-                          <a:t>20%</a:t>
-                        </a:r>
-                      </a:p>
-                    </a:txBody>
-                    <a:tcPr anchor="ctr" marL="63500" marR="63500" marT="38100" marB="38100">
-                      <a:solidFill>
-                        <a:srgbClr val="FFFFFF"/>
-                      </a:solidFill>
-                    </a:tcPr>
-                  </a:tc>
-                  <a:tc>
-                    <a:txBody>
-                      <a:bodyPr wrap="square"/>
-                      <a:lstStyle/>
-                      <a:p>
-                        <a:pPr algn="ctr"/>
-                        <a:r>
-                          <a:rPr sz="1100" b="0">
-                            <a:solidFill>
-                              <a:srgbClr val="222222"/>
-                            </a:solidFill>
-                            <a:latin typeface="Pretendard"/>
-                            <a:ea typeface="Pretendard"/>
-                            <a:cs typeface="Pretendard"/>
-                          </a:rPr>
-                          <a:t>85</a:t>
-                        </a:r>
-                      </a:p>
-                    </a:txBody>
-                    <a:tcPr anchor="ctr" marL="63500" marR="63500" marT="38100" marB="38100">
-                      <a:solidFill>
-                        <a:srgbClr val="FFFFFF"/>
-                      </a:solidFill>
-                    </a:tcPr>
-                  </a:tc>
-                  <a:tc>
-                    <a:txBody>
-                      <a:bodyPr wrap="square"/>
-                      <a:lstStyle/>
-                      <a:p>
-                        <a:pPr algn="ctr"/>
-                        <a:r>
-                          <a:rPr sz="1100" b="1">
-                            <a:solidFill>
-                              <a:srgbClr val="2E75D6"/>
-                            </a:solidFill>
-                            <a:latin typeface="Pretendard"/>
-                            <a:ea typeface="Pretendard"/>
-                            <a:cs typeface="Pretendard"/>
-                          </a:rPr>
-                          <a:t>17.0</a:t>
-                        </a:r>
-                      </a:p>
-                    </a:txBody>
-                    <a:tcPr anchor="ctr" marL="63500" marR="63500" marT="38100" marB="38100">
-                      <a:solidFill>
-                        <a:srgbClr val="F7F9FC"/>
-                      </a:solidFill>
-                    </a:tcPr>
-                  </a:tc>
-                </a:tr>
-                <a:tr h="548640">
-                  <a:tc>
-                    <a:txBody>
-                      <a:bodyPr wrap="square"/>
-                      <a:lstStyle/>
-                      <a:p>
-                        <a:pPr algn="l"/>
-                        <a:r>
-                          <a:rPr sz="1100" b="1">
-                            <a:solidFill>
-                              <a:srgbClr val="222222"/>
-                            </a:solidFill>
-                            <a:latin typeface="Pretendard"/>
-                            <a:ea typeface="Pretendard"/>
-                            <a:cs typeface="Pretendard"/>
-                          </a:rPr>
-                          <a:t>사업 이해도</a:t>
-                        </a:r>
-                      </a:p>
-                    </a:txBody>
-                    <a:tcPr anchor="ctr" marL="63500" marR="63500" marT="38100" marB="38100">
-                      <a:solidFill>
-                        <a:srgbClr val="F2F2F2"/>
-                      </a:solidFill>
-                    </a:tcPr>
-                  </a:tc>
-                  <a:tc>
-                    <a:txBody>
-                      <a:bodyPr wrap="square"/>
-                      <a:lstStyle/>
-                      <a:p>
-                        <a:pPr algn="ctr"/>
-                        <a:r>
-                          <a:rPr sz="1100" b="0">
-                            <a:solidFill>
-                              <a:srgbClr val="595959"/>
-                            </a:solidFill>
-                            <a:latin typeface="Pretendard"/>
-                            <a:ea typeface="Pretendard"/>
-                            <a:cs typeface="Pretendard"/>
-                          </a:rPr>
-                          <a:t>15%</a:t>
-                        </a:r>
-                      </a:p>
-                    </a:txBody>
-                    <a:tcPr anchor="ctr" marL="63500" marR="63500" marT="38100" marB="38100">
-                      <a:solidFill>
-                        <a:srgbClr val="F2F2F2"/>
-                      </a:solidFill>
-                    </a:tcPr>
-                  </a:tc>
-                  <a:tc>
-                    <a:txBody>
-                      <a:bodyPr wrap="square"/>
-                      <a:lstStyle/>
-                      <a:p>
-                        <a:pPr algn="ctr"/>
-                        <a:r>
-                          <a:rPr sz="1100" b="0">
-                            <a:solidFill>
-                              <a:srgbClr val="222222"/>
-                            </a:solidFill>
-                            <a:latin typeface="Pretendard"/>
-                            <a:ea typeface="Pretendard"/>
-                            <a:cs typeface="Pretendard"/>
-                          </a:rPr>
-                          <a:t>92</a:t>
-                        </a:r>
-                      </a:p>
-                    </a:txBody>
-                    <a:tcPr anchor="ctr" marL="63500" marR="63500" marT="38100" marB="38100">
-                      <a:solidFill>
-                        <a:srgbClr val="F2F2F2"/>
-                      </a:solidFill>
-                    </a:tcPr>
-                  </a:tc>
-                  <a:tc>
-                    <a:txBody>
-                      <a:bodyPr wrap="square"/>
-                      <a:lstStyle/>
-                      <a:p>
-                        <a:pPr algn="ctr"/>
-                        <a:r>
-                          <a:rPr sz="1100" b="1">
-                            <a:solidFill>
-                              <a:srgbClr val="2E75D6"/>
-                            </a:solidFill>
-                            <a:latin typeface="Pretendard"/>
-                            <a:ea typeface="Pretendard"/>
-                            <a:cs typeface="Pretendard"/>
-                          </a:rPr>
-                          <a:t>13.8</a:t>
-                        </a:r>
-                      </a:p>
-                    </a:txBody>
-                    <a:tcPr anchor="ctr" marL="63500" marR="63500" marT="38100" marB="38100">
-                      <a:solidFill>
-                        <a:srgbClr val="F7F9FC"/>
-                      </a:solidFill>
-                    </a:tcPr>
-                  </a:tc>
-                </a:tr>
-                <a:tr h="548640">
-                  <a:tc>
-                    <a:txBody>
-                      <a:bodyPr wrap="square"/>
-                      <a:lstStyle/>
-                      <a:p>
-                        <a:pPr algn="l"/>
-                        <a:r>
-                          <a:rPr sz="1100" b="1">
-                            <a:solidFill>
-                              <a:srgbClr val="222222"/>
-                            </a:solidFill>
-                            <a:latin typeface="Pretendard"/>
-                            <a:ea typeface="Pretendard"/>
-                            <a:cs typeface="Pretendard"/>
-                          </a:rPr>
-                          <a:t>실행 가능성</a:t>
-                        </a:r>
-                      </a:p>
-                    </a:txBody>
-                    <a:tcPr anchor="ctr" marL="63500" marR="63500" marT="38100" marB="38100">
-                      <a:solidFill>
-                        <a:srgbClr val="FFFFFF"/>
-                      </a:solidFill>
-                    </a:tcPr>
-                  </a:tc>
-                  <a:tc>
-                    <a:txBody>
-                      <a:bodyPr wrap="square"/>
-                      <a:lstStyle/>
-                      <a:p>
-                        <a:pPr algn="ctr"/>
-                        <a:r>
-                          <a:rPr sz="1100" b="0">
-                            <a:solidFill>
-                              <a:srgbClr val="595959"/>
-                            </a:solidFill>
-                            <a:latin typeface="Pretendard"/>
-                            <a:ea typeface="Pretendard"/>
-                            <a:cs typeface="Pretendard"/>
-                          </a:rPr>
-                          <a:t>15%</a:t>
-                        </a:r>
-                      </a:p>
-                    </a:txBody>
-                    <a:tcPr anchor="ctr" marL="63500" marR="63500" marT="38100" marB="38100">
-                      <a:solidFill>
-                        <a:srgbClr val="FFFFFF"/>
-                      </a:solidFill>
-                    </a:tcPr>
-                  </a:tc>
-                  <a:tc>
-                    <a:txBody>
-                      <a:bodyPr wrap="square"/>
-                      <a:lstStyle/>
-                      <a:p>
-                        <a:pPr algn="ctr"/>
-                        <a:r>
-                          <a:rPr sz="1100" b="0">
-                            <a:solidFill>
-                              <a:srgbClr val="222222"/>
-                            </a:solidFill>
-                            <a:latin typeface="Pretendard"/>
-                            <a:ea typeface="Pretendard"/>
-                            <a:cs typeface="Pretendard"/>
-                          </a:rPr>
-                          <a:t>86</a:t>
-                        </a:r>
-                      </a:p>
-                    </a:txBody>
-                    <a:tcPr anchor="ctr" marL="63500" marR="63500" marT="38100" marB="38100">
-                      <a:solidFill>
-                        <a:srgbClr val="FFFFFF"/>
-                      </a:solidFill>
-                    </a:tcPr>
-                  </a:tc>
-                  <a:tc>
-                    <a:txBody>
-                      <a:bodyPr wrap="square"/>
-                      <a:lstStyle/>
-                      <a:p>
-                        <a:pPr algn="ctr"/>
-                        <a:r>
-                          <a:rPr sz="1100" b="1">
-                            <a:solidFill>
-                              <a:srgbClr val="2E75D6"/>
-                            </a:solidFill>
-                            <a:latin typeface="Pretendard"/>
-                            <a:ea typeface="Pretendard"/>
-                            <a:cs typeface="Pretendard"/>
-                          </a:rPr>
-                          <a:t>12.9</a:t>
-                        </a:r>
-                      </a:p>
-                    </a:txBody>
-                    <a:tcPr anchor="ctr" marL="63500" marR="63500" marT="38100" marB="38100">
-                      <a:solidFill>
-                        <a:srgbClr val="F7F9FC"/>
-                      </a:solidFill>
-                    </a:tcPr>
-                  </a:tc>
-                </a:tr>
-                <a:tr h="548640">
-                  <a:tc>
-                    <a:txBody>
-                      <a:bodyPr wrap="square"/>
-                      <a:lstStyle/>
-                      <a:p>
-                        <a:pPr algn="l"/>
-                        <a:r>
-                          <a:rPr sz="1200" b="1">
-                            <a:solidFill>
-                              <a:srgbClr val="FFFFFF"/>
-                            </a:solidFill>
-                            <a:latin typeface="Pretendard"/>
-                            <a:ea typeface="Pretendard"/>
-                            <a:cs typeface="Pretendard"/>
-                          </a:rPr>
-                          <a:t>종합 환산점수</a:t>
-                        </a:r>
-                      </a:p>
-                    </a:txBody>
-                    <a:tcPr anchor="ctr" marL="63500" marR="63500" marT="38100" marB="38100">
-                      <a:solidFill>
-                        <a:srgbClr val="2A4A7F"/>
-                      </a:solidFill>
-                    </a:tcPr>
-                  </a:tc>
-                  <a:tc>
-                    <a:txBody>
-                      <a:bodyPr wrap="square"/>
-                      <a:lstStyle/>
-                      <a:p>
-                        <a:pPr algn="ctr"/>
-                        <a:r>
-                          <a:rPr sz="1200" b="1">
-                            <a:solidFill>
-                              <a:srgbClr val="FFFFFF"/>
-                            </a:solidFill>
-                            <a:latin typeface="Pretendard"/>
-                            <a:ea typeface="Pretendard"/>
-                            <a:cs typeface="Pretendard"/>
-                          </a:rPr>
-                          <a:t>100%</a:t>
-                        </a:r>
-                      </a:p>
-                    </a:txBody>
-                    <a:tcPr anchor="ctr" marL="63500" marR="63500" marT="38100" marB="38100">
-                      <a:solidFill>
-                        <a:srgbClr val="2A4A7F"/>
-                      </a:solidFill>
-                    </a:tcPr>
-                  </a:tc>
-                  <a:tc>
-                    <a:txBody>
-                      <a:bodyPr wrap="square"/>
-                      <a:lstStyle/>
-                      <a:p>
-                        <a:pPr algn="ctr"/>
-                        <a:r>
-                          <a:rPr sz="1200" b="1">
-                            <a:solidFill>
-                              <a:srgbClr val="FFFFFF"/>
-                            </a:solidFill>
-                            <a:latin typeface="Pretendard"/>
-                            <a:ea typeface="Pretendard"/>
-                            <a:cs typeface="Pretendard"/>
-                          </a:rPr>
-                          <a:t>—</a:t>
-                        </a:r>
-                      </a:p>
-                    </a:txBody>
-                    <a:tcPr anchor="ctr" marL="63500" marR="63500" marT="38100" marB="38100">
-                      <a:solidFill>
-                        <a:srgbClr val="2A4A7F"/>
-                      </a:solidFill>
-                    </a:tcPr>
-                  </a:tc>
-                  <a:tc>
-                    <a:txBody>
-                      <a:bodyPr wrap="square"/>
-                      <a:lstStyle/>
-                      <a:p>
-                        <a:pPr algn="ctr"/>
-                        <a:r>
-                          <a:rPr sz="1300" b="1">
-                            <a:solidFill>
-                              <a:srgbClr val="29ABE2"/>
-                            </a:solidFill>
-                            <a:latin typeface="Pretendard"/>
-                            <a:ea typeface="Pretendard"/>
-                            <a:cs typeface="Pretendard"/>
-                          </a:rPr>
-                          <a:t>88.3</a:t>
-                        </a:r>
-                      </a:p>
-                    </a:txBody>
-                    <a:tcPr anchor="ctr" marL="63500" marR="63500" marT="38100" marB="38100">
-                      <a:solidFill>
-                        <a:srgbClr val="2A4A7F"/>
-                      </a:solidFill>
-                    </a:tcPr>
-                  </a:tc>
-                </a:tr>
-              </a:tbl>
-            </a:graphicData>
-          </a:graphic>
-        </p:graphicFrame>
-      </p:grpSp>
+          <a:prstGeom prst="rect">
+            <a:avLst/>
+          </a:prstGeom>
+          <a:noFill/>
+        </p:spPr>
+        <p:txBody>
+          <a:bodyPr wrap="square" anchor="ctr" lIns="38100" rIns="38100" tIns="25400" bIns="25400">
+            <a:spAutoFit/>
+          </a:bodyPr>
+          <a:lstStyle/>
+          <a:p>
+            <a:pPr algn="l"/>
+            <a:r>
+              <a:rPr sz="1800" b="1">
+                <a:solidFill>
+                  <a:srgbClr val="1F3864"/>
+                </a:solidFill>
+                <a:latin typeface="Pretendard"/>
+                <a:ea typeface="Pretendard"/>
+                <a:cs typeface="Pretendard"/>
+              </a:rPr>
+              <a:t>가중치 스코어카드 (환산점수)</a:t>
+            </a:r>
+          </a:p>
+        </p:txBody>
+      </p:sp>
+      <p:sp>
+        <p:nvSpPr>
+          <p:cNvPr id="4" name="TextBox 3"/>
+          <p:cNvSpPr txBox="1"/>
+          <p:nvPr/>
+        </p:nvSpPr>
+        <p:spPr>
+          <a:xfrm>
+            <a:off x="502920" y="932688"/>
+            <a:ext cx="11155680" cy="292608"/>
+          </a:xfrm>
+          <a:prstGeom prst="rect">
+            <a:avLst/>
+          </a:prstGeom>
+          <a:noFill/>
+        </p:spPr>
+        <p:txBody>
+          <a:bodyPr wrap="square" anchor="ctr" lIns="38100" rIns="38100" tIns="25400" bIns="25400">
+            <a:spAutoFit/>
+          </a:bodyPr>
+          <a:lstStyle/>
+          <a:p>
+            <a:pPr algn="l"/>
+            <a:r>
+              <a:rPr sz="1100" b="0">
+                <a:solidFill>
+                  <a:srgbClr val="595959"/>
+                </a:solidFill>
+                <a:latin typeface="Pretendard"/>
+                <a:ea typeface="Pretendard"/>
+                <a:cs typeface="Pretendard"/>
+              </a:rPr>
+              <a:t>항목별 가중치 × 점수 = 환산점수, 종합 환산점수 합산</a:t>
+            </a:r>
+          </a:p>
+        </p:txBody>
+      </p:sp>
+      <p:graphicFrame>
+        <p:nvGraphicFramePr>
+          <p:cNvPr id="5" name="asset:CMP-014"/>
+          <p:cNvGraphicFramePr>
+            <a:graphicFrameLocks noGrp="1"/>
+          </p:cNvGraphicFramePr>
+          <p:nvPr/>
+        </p:nvGraphicFramePr>
+        <p:xfrm>
+          <a:off x="1463040" y="1554480"/>
+          <a:ext cx="9235440" cy="3840480"/>
+        </p:xfrm>
+        <a:graphic>
+          <a:graphicData uri="http://schemas.openxmlformats.org/drawingml/2006/table">
+            <a:tbl>
+              <a:tblPr>
+                <a:tableStyleId>{5C22544A-7EE6-4342-B048-85BDC9FD1C3A}</a:tableStyleId>
+              </a:tblPr>
+              <a:tblGrid>
+                <a:gridCol w="3931920"/>
+                <a:gridCol w="1737360"/>
+                <a:gridCol w="1737360"/>
+                <a:gridCol w="1828800"/>
+              </a:tblGrid>
+              <a:tr h="548640">
+                <a:tc>
+                  <a:txBody>
+                    <a:bodyPr wrap="square"/>
+                    <a:lstStyle/>
+                    <a:p>
+                      <a:pPr algn="l"/>
+                      <a:r>
+                        <a:rPr sz="1200" b="1">
+                          <a:solidFill>
+                            <a:srgbClr val="FFFFFF"/>
+                          </a:solidFill>
+                          <a:latin typeface="Pretendard"/>
+                          <a:ea typeface="Pretendard"/>
+                          <a:cs typeface="Pretendard"/>
+                        </a:rPr>
+                        <a:t>평가 항목</a:t>
+                      </a:r>
+                    </a:p>
+                  </a:txBody>
+                  <a:tcPr anchor="ctr" marL="63500" marR="63500" marT="38100" marB="38100">
+                    <a:solidFill>
+                      <a:srgbClr val="1F3864"/>
+                    </a:solidFill>
+                  </a:tcPr>
+                </a:tc>
+                <a:tc>
+                  <a:txBody>
+                    <a:bodyPr wrap="square"/>
+                    <a:lstStyle/>
+                    <a:p>
+                      <a:pPr algn="ctr"/>
+                      <a:r>
+                        <a:rPr sz="1200" b="1">
+                          <a:solidFill>
+                            <a:srgbClr val="FFFFFF"/>
+                          </a:solidFill>
+                          <a:latin typeface="Pretendard"/>
+                          <a:ea typeface="Pretendard"/>
+                          <a:cs typeface="Pretendard"/>
+                        </a:rPr>
+                        <a:t>가중치</a:t>
+                      </a:r>
+                    </a:p>
+                  </a:txBody>
+                  <a:tcPr anchor="ctr" marL="63500" marR="63500" marT="38100" marB="38100">
+                    <a:solidFill>
+                      <a:srgbClr val="1F3864"/>
+                    </a:solidFill>
+                  </a:tcPr>
+                </a:tc>
+                <a:tc>
+                  <a:txBody>
+                    <a:bodyPr wrap="square"/>
+                    <a:lstStyle/>
+                    <a:p>
+                      <a:pPr algn="ctr"/>
+                      <a:r>
+                        <a:rPr sz="1200" b="1">
+                          <a:solidFill>
+                            <a:srgbClr val="FFFFFF"/>
+                          </a:solidFill>
+                          <a:latin typeface="Pretendard"/>
+                          <a:ea typeface="Pretendard"/>
+                          <a:cs typeface="Pretendard"/>
+                        </a:rPr>
+                        <a:t>점수(/100)</a:t>
+                      </a:r>
+                    </a:p>
+                  </a:txBody>
+                  <a:tcPr anchor="ctr" marL="63500" marR="63500" marT="38100" marB="38100">
+                    <a:solidFill>
+                      <a:srgbClr val="1F3864"/>
+                    </a:solidFill>
+                  </a:tcPr>
+                </a:tc>
+                <a:tc>
+                  <a:txBody>
+                    <a:bodyPr wrap="square"/>
+                    <a:lstStyle/>
+                    <a:p>
+                      <a:pPr algn="ctr"/>
+                      <a:r>
+                        <a:rPr sz="1200" b="1">
+                          <a:solidFill>
+                            <a:srgbClr val="FFFFFF"/>
+                          </a:solidFill>
+                          <a:latin typeface="Pretendard"/>
+                          <a:ea typeface="Pretendard"/>
+                          <a:cs typeface="Pretendard"/>
+                        </a:rPr>
+                        <a:t>환산점수</a:t>
+                      </a:r>
+                    </a:p>
+                  </a:txBody>
+                  <a:tcPr anchor="ctr" marL="63500" marR="63500" marT="38100" marB="38100">
+                    <a:solidFill>
+                      <a:srgbClr val="1F3864"/>
+                    </a:solidFill>
+                  </a:tcPr>
+                </a:tc>
+              </a:tr>
+              <a:tr h="548640">
+                <a:tc>
+                  <a:txBody>
+                    <a:bodyPr wrap="square"/>
+                    <a:lstStyle/>
+                    <a:p>
+                      <a:pPr algn="l"/>
+                      <a:r>
+                        <a:rPr sz="1100" b="1">
+                          <a:solidFill>
+                            <a:srgbClr val="222222"/>
+                          </a:solidFill>
+                          <a:latin typeface="Pretendard"/>
+                          <a:ea typeface="Pretendard"/>
+                          <a:cs typeface="Pretendard"/>
+                        </a:rPr>
+                        <a:t>글로벌 역량</a:t>
+                      </a:r>
+                    </a:p>
+                  </a:txBody>
+                  <a:tcPr anchor="ctr" marL="63500" marR="63500" marT="38100" marB="38100">
+                    <a:solidFill>
+                      <a:srgbClr val="FFFFFF"/>
+                    </a:solidFill>
+                  </a:tcPr>
+                </a:tc>
+                <a:tc>
+                  <a:txBody>
+                    <a:bodyPr wrap="square"/>
+                    <a:lstStyle/>
+                    <a:p>
+                      <a:pPr algn="ctr"/>
+                      <a:r>
+                        <a:rPr sz="1100" b="0">
+                          <a:solidFill>
+                            <a:srgbClr val="595959"/>
+                          </a:solidFill>
+                          <a:latin typeface="Pretendard"/>
+                          <a:ea typeface="Pretendard"/>
+                          <a:cs typeface="Pretendard"/>
+                        </a:rPr>
+                        <a:t>30%</a:t>
+                      </a:r>
+                    </a:p>
+                  </a:txBody>
+                  <a:tcPr anchor="ctr" marL="63500" marR="63500" marT="38100" marB="38100">
+                    <a:solidFill>
+                      <a:srgbClr val="FFFFFF"/>
+                    </a:solidFill>
+                  </a:tcPr>
+                </a:tc>
+                <a:tc>
+                  <a:txBody>
+                    <a:bodyPr wrap="square"/>
+                    <a:lstStyle/>
+                    <a:p>
+                      <a:pPr algn="ctr"/>
+                      <a:r>
+                        <a:rPr sz="1100" b="0">
+                          <a:solidFill>
+                            <a:srgbClr val="222222"/>
+                          </a:solidFill>
+                          <a:latin typeface="Pretendard"/>
+                          <a:ea typeface="Pretendard"/>
+                          <a:cs typeface="Pretendard"/>
+                        </a:rPr>
+                        <a:t>90</a:t>
+                      </a:r>
+                    </a:p>
+                  </a:txBody>
+                  <a:tcPr anchor="ctr" marL="63500" marR="63500" marT="38100" marB="38100">
+                    <a:solidFill>
+                      <a:srgbClr val="FFFFFF"/>
+                    </a:solidFill>
+                  </a:tcPr>
+                </a:tc>
+                <a:tc>
+                  <a:txBody>
+                    <a:bodyPr wrap="square"/>
+                    <a:lstStyle/>
+                    <a:p>
+                      <a:pPr algn="ctr"/>
+                      <a:r>
+                        <a:rPr sz="1100" b="1">
+                          <a:solidFill>
+                            <a:srgbClr val="2E75D6"/>
+                          </a:solidFill>
+                          <a:latin typeface="Pretendard"/>
+                          <a:ea typeface="Pretendard"/>
+                          <a:cs typeface="Pretendard"/>
+                        </a:rPr>
+                        <a:t>27.0</a:t>
+                      </a:r>
+                    </a:p>
+                  </a:txBody>
+                  <a:tcPr anchor="ctr" marL="63500" marR="63500" marT="38100" marB="38100">
+                    <a:solidFill>
+                      <a:srgbClr val="F7F9FC"/>
+                    </a:solidFill>
+                  </a:tcPr>
+                </a:tc>
+              </a:tr>
+              <a:tr h="548640">
+                <a:tc>
+                  <a:txBody>
+                    <a:bodyPr wrap="square"/>
+                    <a:lstStyle/>
+                    <a:p>
+                      <a:pPr algn="l"/>
+                      <a:r>
+                        <a:rPr sz="1100" b="1">
+                          <a:solidFill>
+                            <a:srgbClr val="222222"/>
+                          </a:solidFill>
+                          <a:latin typeface="Pretendard"/>
+                          <a:ea typeface="Pretendard"/>
+                          <a:cs typeface="Pretendard"/>
+                        </a:rPr>
+                        <a:t>협업 역량</a:t>
+                      </a:r>
+                    </a:p>
+                  </a:txBody>
+                  <a:tcPr anchor="ctr" marL="63500" marR="63500" marT="38100" marB="38100">
+                    <a:solidFill>
+                      <a:srgbClr val="F2F2F2"/>
+                    </a:solidFill>
+                  </a:tcPr>
+                </a:tc>
+                <a:tc>
+                  <a:txBody>
+                    <a:bodyPr wrap="square"/>
+                    <a:lstStyle/>
+                    <a:p>
+                      <a:pPr algn="ctr"/>
+                      <a:r>
+                        <a:rPr sz="1100" b="0">
+                          <a:solidFill>
+                            <a:srgbClr val="595959"/>
+                          </a:solidFill>
+                          <a:latin typeface="Pretendard"/>
+                          <a:ea typeface="Pretendard"/>
+                          <a:cs typeface="Pretendard"/>
+                        </a:rPr>
+                        <a:t>20%</a:t>
+                      </a:r>
+                    </a:p>
+                  </a:txBody>
+                  <a:tcPr anchor="ctr" marL="63500" marR="63500" marT="38100" marB="38100">
+                    <a:solidFill>
+                      <a:srgbClr val="F2F2F2"/>
+                    </a:solidFill>
+                  </a:tcPr>
+                </a:tc>
+                <a:tc>
+                  <a:txBody>
+                    <a:bodyPr wrap="square"/>
+                    <a:lstStyle/>
+                    <a:p>
+                      <a:pPr algn="ctr"/>
+                      <a:r>
+                        <a:rPr sz="1100" b="0">
+                          <a:solidFill>
+                            <a:srgbClr val="222222"/>
+                          </a:solidFill>
+                          <a:latin typeface="Pretendard"/>
+                          <a:ea typeface="Pretendard"/>
+                          <a:cs typeface="Pretendard"/>
+                        </a:rPr>
+                        <a:t>88</a:t>
+                      </a:r>
+                    </a:p>
+                  </a:txBody>
+                  <a:tcPr anchor="ctr" marL="63500" marR="63500" marT="38100" marB="38100">
+                    <a:solidFill>
+                      <a:srgbClr val="F2F2F2"/>
+                    </a:solidFill>
+                  </a:tcPr>
+                </a:tc>
+                <a:tc>
+                  <a:txBody>
+                    <a:bodyPr wrap="square"/>
+                    <a:lstStyle/>
+                    <a:p>
+                      <a:pPr algn="ctr"/>
+                      <a:r>
+                        <a:rPr sz="1100" b="1">
+                          <a:solidFill>
+                            <a:srgbClr val="2E75D6"/>
+                          </a:solidFill>
+                          <a:latin typeface="Pretendard"/>
+                          <a:ea typeface="Pretendard"/>
+                          <a:cs typeface="Pretendard"/>
+                        </a:rPr>
+                        <a:t>17.6</a:t>
+                      </a:r>
+                    </a:p>
+                  </a:txBody>
+                  <a:tcPr anchor="ctr" marL="63500" marR="63500" marT="38100" marB="38100">
+                    <a:solidFill>
+                      <a:srgbClr val="F7F9FC"/>
+                    </a:solidFill>
+                  </a:tcPr>
+                </a:tc>
+              </a:tr>
+              <a:tr h="548640">
+                <a:tc>
+                  <a:txBody>
+                    <a:bodyPr wrap="square"/>
+                    <a:lstStyle/>
+                    <a:p>
+                      <a:pPr algn="l"/>
+                      <a:r>
+                        <a:rPr sz="1100" b="1">
+                          <a:solidFill>
+                            <a:srgbClr val="222222"/>
+                          </a:solidFill>
+                          <a:latin typeface="Pretendard"/>
+                          <a:ea typeface="Pretendard"/>
+                          <a:cs typeface="Pretendard"/>
+                        </a:rPr>
+                        <a:t>AI 활용도</a:t>
+                      </a:r>
+                    </a:p>
+                  </a:txBody>
+                  <a:tcPr anchor="ctr" marL="63500" marR="63500" marT="38100" marB="38100">
+                    <a:solidFill>
+                      <a:srgbClr val="FFFFFF"/>
+                    </a:solidFill>
+                  </a:tcPr>
+                </a:tc>
+                <a:tc>
+                  <a:txBody>
+                    <a:bodyPr wrap="square"/>
+                    <a:lstStyle/>
+                    <a:p>
+                      <a:pPr algn="ctr"/>
+                      <a:r>
+                        <a:rPr sz="1100" b="0">
+                          <a:solidFill>
+                            <a:srgbClr val="595959"/>
+                          </a:solidFill>
+                          <a:latin typeface="Pretendard"/>
+                          <a:ea typeface="Pretendard"/>
+                          <a:cs typeface="Pretendard"/>
+                        </a:rPr>
+                        <a:t>20%</a:t>
+                      </a:r>
+                    </a:p>
+                  </a:txBody>
+                  <a:tcPr anchor="ctr" marL="63500" marR="63500" marT="38100" marB="38100">
+                    <a:solidFill>
+                      <a:srgbClr val="FFFFFF"/>
+                    </a:solidFill>
+                  </a:tcPr>
+                </a:tc>
+                <a:tc>
+                  <a:txBody>
+                    <a:bodyPr wrap="square"/>
+                    <a:lstStyle/>
+                    <a:p>
+                      <a:pPr algn="ctr"/>
+                      <a:r>
+                        <a:rPr sz="1100" b="0">
+                          <a:solidFill>
+                            <a:srgbClr val="222222"/>
+                          </a:solidFill>
+                          <a:latin typeface="Pretendard"/>
+                          <a:ea typeface="Pretendard"/>
+                          <a:cs typeface="Pretendard"/>
+                        </a:rPr>
+                        <a:t>85</a:t>
+                      </a:r>
+                    </a:p>
+                  </a:txBody>
+                  <a:tcPr anchor="ctr" marL="63500" marR="63500" marT="38100" marB="38100">
+                    <a:solidFill>
+                      <a:srgbClr val="FFFFFF"/>
+                    </a:solidFill>
+                  </a:tcPr>
+                </a:tc>
+                <a:tc>
+                  <a:txBody>
+                    <a:bodyPr wrap="square"/>
+                    <a:lstStyle/>
+                    <a:p>
+                      <a:pPr algn="ctr"/>
+                      <a:r>
+                        <a:rPr sz="1100" b="1">
+                          <a:solidFill>
+                            <a:srgbClr val="2E75D6"/>
+                          </a:solidFill>
+                          <a:latin typeface="Pretendard"/>
+                          <a:ea typeface="Pretendard"/>
+                          <a:cs typeface="Pretendard"/>
+                        </a:rPr>
+                        <a:t>17.0</a:t>
+                      </a:r>
+                    </a:p>
+                  </a:txBody>
+                  <a:tcPr anchor="ctr" marL="63500" marR="63500" marT="38100" marB="38100">
+                    <a:solidFill>
+                      <a:srgbClr val="F7F9FC"/>
+                    </a:solidFill>
+                  </a:tcPr>
+                </a:tc>
+              </a:tr>
+              <a:tr h="548640">
+                <a:tc>
+                  <a:txBody>
+                    <a:bodyPr wrap="square"/>
+                    <a:lstStyle/>
+                    <a:p>
+                      <a:pPr algn="l"/>
+                      <a:r>
+                        <a:rPr sz="1100" b="1">
+                          <a:solidFill>
+                            <a:srgbClr val="222222"/>
+                          </a:solidFill>
+                          <a:latin typeface="Pretendard"/>
+                          <a:ea typeface="Pretendard"/>
+                          <a:cs typeface="Pretendard"/>
+                        </a:rPr>
+                        <a:t>사업 이해도</a:t>
+                      </a:r>
+                    </a:p>
+                  </a:txBody>
+                  <a:tcPr anchor="ctr" marL="63500" marR="63500" marT="38100" marB="38100">
+                    <a:solidFill>
+                      <a:srgbClr val="F2F2F2"/>
+                    </a:solidFill>
+                  </a:tcPr>
+                </a:tc>
+                <a:tc>
+                  <a:txBody>
+                    <a:bodyPr wrap="square"/>
+                    <a:lstStyle/>
+                    <a:p>
+                      <a:pPr algn="ctr"/>
+                      <a:r>
+                        <a:rPr sz="1100" b="0">
+                          <a:solidFill>
+                            <a:srgbClr val="595959"/>
+                          </a:solidFill>
+                          <a:latin typeface="Pretendard"/>
+                          <a:ea typeface="Pretendard"/>
+                          <a:cs typeface="Pretendard"/>
+                        </a:rPr>
+                        <a:t>15%</a:t>
+                      </a:r>
+                    </a:p>
+                  </a:txBody>
+                  <a:tcPr anchor="ctr" marL="63500" marR="63500" marT="38100" marB="38100">
+                    <a:solidFill>
+                      <a:srgbClr val="F2F2F2"/>
+                    </a:solidFill>
+                  </a:tcPr>
+                </a:tc>
+                <a:tc>
+                  <a:txBody>
+                    <a:bodyPr wrap="square"/>
+                    <a:lstStyle/>
+                    <a:p>
+                      <a:pPr algn="ctr"/>
+                      <a:r>
+                        <a:rPr sz="1100" b="0">
+                          <a:solidFill>
+                            <a:srgbClr val="222222"/>
+                          </a:solidFill>
+                          <a:latin typeface="Pretendard"/>
+                          <a:ea typeface="Pretendard"/>
+                          <a:cs typeface="Pretendard"/>
+                        </a:rPr>
+                        <a:t>92</a:t>
+                      </a:r>
+                    </a:p>
+                  </a:txBody>
+                  <a:tcPr anchor="ctr" marL="63500" marR="63500" marT="38100" marB="38100">
+                    <a:solidFill>
+                      <a:srgbClr val="F2F2F2"/>
+                    </a:solidFill>
+                  </a:tcPr>
+                </a:tc>
+                <a:tc>
+                  <a:txBody>
+                    <a:bodyPr wrap="square"/>
+                    <a:lstStyle/>
+                    <a:p>
+                      <a:pPr algn="ctr"/>
+                      <a:r>
+                        <a:rPr sz="1100" b="1">
+                          <a:solidFill>
+                            <a:srgbClr val="2E75D6"/>
+                          </a:solidFill>
+                          <a:latin typeface="Pretendard"/>
+                          <a:ea typeface="Pretendard"/>
+                          <a:cs typeface="Pretendard"/>
+                        </a:rPr>
+                        <a:t>13.8</a:t>
+                      </a:r>
+                    </a:p>
+                  </a:txBody>
+                  <a:tcPr anchor="ctr" marL="63500" marR="63500" marT="38100" marB="38100">
+                    <a:solidFill>
+                      <a:srgbClr val="F7F9FC"/>
+                    </a:solidFill>
+                  </a:tcPr>
+                </a:tc>
+              </a:tr>
+              <a:tr h="548640">
+                <a:tc>
+                  <a:txBody>
+                    <a:bodyPr wrap="square"/>
+                    <a:lstStyle/>
+                    <a:p>
+                      <a:pPr algn="l"/>
+                      <a:r>
+                        <a:rPr sz="1100" b="1">
+                          <a:solidFill>
+                            <a:srgbClr val="222222"/>
+                          </a:solidFill>
+                          <a:latin typeface="Pretendard"/>
+                          <a:ea typeface="Pretendard"/>
+                          <a:cs typeface="Pretendard"/>
+                        </a:rPr>
+                        <a:t>실행 가능성</a:t>
+                      </a:r>
+                    </a:p>
+                  </a:txBody>
+                  <a:tcPr anchor="ctr" marL="63500" marR="63500" marT="38100" marB="38100">
+                    <a:solidFill>
+                      <a:srgbClr val="FFFFFF"/>
+                    </a:solidFill>
+                  </a:tcPr>
+                </a:tc>
+                <a:tc>
+                  <a:txBody>
+                    <a:bodyPr wrap="square"/>
+                    <a:lstStyle/>
+                    <a:p>
+                      <a:pPr algn="ctr"/>
+                      <a:r>
+                        <a:rPr sz="1100" b="0">
+                          <a:solidFill>
+                            <a:srgbClr val="595959"/>
+                          </a:solidFill>
+                          <a:latin typeface="Pretendard"/>
+                          <a:ea typeface="Pretendard"/>
+                          <a:cs typeface="Pretendard"/>
+                        </a:rPr>
+                        <a:t>15%</a:t>
+                      </a:r>
+                    </a:p>
+                  </a:txBody>
+                  <a:tcPr anchor="ctr" marL="63500" marR="63500" marT="38100" marB="38100">
+                    <a:solidFill>
+                      <a:srgbClr val="FFFFFF"/>
+                    </a:solidFill>
+                  </a:tcPr>
+                </a:tc>
+                <a:tc>
+                  <a:txBody>
+                    <a:bodyPr wrap="square"/>
+                    <a:lstStyle/>
+                    <a:p>
+                      <a:pPr algn="ctr"/>
+                      <a:r>
+                        <a:rPr sz="1100" b="0">
+                          <a:solidFill>
+                            <a:srgbClr val="222222"/>
+                          </a:solidFill>
+                          <a:latin typeface="Pretendard"/>
+                          <a:ea typeface="Pretendard"/>
+                          <a:cs typeface="Pretendard"/>
+                        </a:rPr>
+                        <a:t>86</a:t>
+                      </a:r>
+                    </a:p>
+                  </a:txBody>
+                  <a:tcPr anchor="ctr" marL="63500" marR="63500" marT="38100" marB="38100">
+                    <a:solidFill>
+                      <a:srgbClr val="FFFFFF"/>
+                    </a:solidFill>
+                  </a:tcPr>
+                </a:tc>
+                <a:tc>
+                  <a:txBody>
+                    <a:bodyPr wrap="square"/>
+                    <a:lstStyle/>
+                    <a:p>
+                      <a:pPr algn="ctr"/>
+                      <a:r>
+                        <a:rPr sz="1100" b="1">
+                          <a:solidFill>
+                            <a:srgbClr val="2E75D6"/>
+                          </a:solidFill>
+                          <a:latin typeface="Pretendard"/>
+                          <a:ea typeface="Pretendard"/>
+                          <a:cs typeface="Pretendard"/>
+                        </a:rPr>
+                        <a:t>12.9</a:t>
+                      </a:r>
+                    </a:p>
+                  </a:txBody>
+                  <a:tcPr anchor="ctr" marL="63500" marR="63500" marT="38100" marB="38100">
+                    <a:solidFill>
+                      <a:srgbClr val="F7F9FC"/>
+                    </a:solidFill>
+                  </a:tcPr>
+                </a:tc>
+              </a:tr>
+              <a:tr h="548640">
+                <a:tc>
+                  <a:txBody>
+                    <a:bodyPr wrap="square"/>
+                    <a:lstStyle/>
+                    <a:p>
+                      <a:pPr algn="l"/>
+                      <a:r>
+                        <a:rPr sz="1200" b="1">
+                          <a:solidFill>
+                            <a:srgbClr val="FFFFFF"/>
+                          </a:solidFill>
+                          <a:latin typeface="Pretendard"/>
+                          <a:ea typeface="Pretendard"/>
+                          <a:cs typeface="Pretendard"/>
+                        </a:rPr>
+                        <a:t>종합 환산점수</a:t>
+                      </a:r>
+                    </a:p>
+                  </a:txBody>
+                  <a:tcPr anchor="ctr" marL="63500" marR="63500" marT="38100" marB="38100">
+                    <a:solidFill>
+                      <a:srgbClr val="2A4A7F"/>
+                    </a:solidFill>
+                  </a:tcPr>
+                </a:tc>
+                <a:tc>
+                  <a:txBody>
+                    <a:bodyPr wrap="square"/>
+                    <a:lstStyle/>
+                    <a:p>
+                      <a:pPr algn="ctr"/>
+                      <a:r>
+                        <a:rPr sz="1200" b="1">
+                          <a:solidFill>
+                            <a:srgbClr val="FFFFFF"/>
+                          </a:solidFill>
+                          <a:latin typeface="Pretendard"/>
+                          <a:ea typeface="Pretendard"/>
+                          <a:cs typeface="Pretendard"/>
+                        </a:rPr>
+                        <a:t>100%</a:t>
+                      </a:r>
+                    </a:p>
+                  </a:txBody>
+                  <a:tcPr anchor="ctr" marL="63500" marR="63500" marT="38100" marB="38100">
+                    <a:solidFill>
+                      <a:srgbClr val="2A4A7F"/>
+                    </a:solidFill>
+                  </a:tcPr>
+                </a:tc>
+                <a:tc>
+                  <a:txBody>
+                    <a:bodyPr wrap="square"/>
+                    <a:lstStyle/>
+                    <a:p>
+                      <a:pPr algn="ctr"/>
+                      <a:r>
+                        <a:rPr sz="1200" b="1">
+                          <a:solidFill>
+                            <a:srgbClr val="FFFFFF"/>
+                          </a:solidFill>
+                          <a:latin typeface="Pretendard"/>
+                          <a:ea typeface="Pretendard"/>
+                          <a:cs typeface="Pretendard"/>
+                        </a:rPr>
+                        <a:t>—</a:t>
+                      </a:r>
+                    </a:p>
+                  </a:txBody>
+                  <a:tcPr anchor="ctr" marL="63500" marR="63500" marT="38100" marB="38100">
+                    <a:solidFill>
+                      <a:srgbClr val="2A4A7F"/>
+                    </a:solidFill>
+                  </a:tcPr>
+                </a:tc>
+                <a:tc>
+                  <a:txBody>
+                    <a:bodyPr wrap="square"/>
+                    <a:lstStyle/>
+                    <a:p>
+                      <a:pPr algn="ctr"/>
+                      <a:r>
+                        <a:rPr sz="1300" b="1">
+                          <a:solidFill>
+                            <a:srgbClr val="29ABE2"/>
+                          </a:solidFill>
+                          <a:latin typeface="Pretendard"/>
+                          <a:ea typeface="Pretendard"/>
+                          <a:cs typeface="Pretendard"/>
+                        </a:rPr>
+                        <a:t>88.3</a:t>
+                      </a:r>
+                    </a:p>
+                  </a:txBody>
+                  <a:tcPr anchor="ctr" marL="63500" marR="63500" marT="38100" marB="38100">
+                    <a:solidFill>
+                      <a:srgbClr val="2A4A7F"/>
+                    </a:solidFill>
+                  </a:tcPr>
+                </a:tc>
+              </a:tr>
+            </a:tbl>
+          </a:graphicData>
+        </a:graphic>
+      </p:graphicFrame>
     </p:spTree>
   </p:cSld>
   <p:clrMapOvr>
@@ -4012,735 +3997,720 @@
           </a:p>
         </p:txBody>
       </p:sp>
-      <p:grpSp>
-        <p:nvGrpSpPr>
-          <p:cNvPr id="6" name="asset:CMP-018"/>
-          <p:cNvGrpSpPr/>
+      <p:sp>
+        <p:nvSpPr>
+          <p:cNvPr id="3" name="TextBox 2"/>
+          <p:cNvSpPr txBox="1"/>
           <p:nvPr/>
-        </p:nvGrpSpPr>
-        <p:grpSpPr>
+        </p:nvSpPr>
+        <p:spPr>
           <a:xfrm>
             <a:off x="502920" y="475488"/>
-            <a:ext cx="11155680" cy="4480560"/>
-            <a:chOff x="502920" y="475488"/>
-            <a:chExt cx="11155680" cy="4480560"/>
+            <a:ext cx="11155680" cy="457200"/>
           </a:xfrm>
-        </p:grpSpPr>
-        <p:sp>
-          <p:nvSpPr>
-            <p:cNvPr id="3" name="TextBox 2"/>
-            <p:cNvSpPr txBox="1"/>
-            <p:nvPr/>
-          </p:nvSpPr>
-          <p:spPr>
-            <a:xfrm>
-              <a:off x="502920" y="475488"/>
-              <a:ext cx="11155680" cy="457200"/>
-            </a:xfrm>
-            <a:prstGeom prst="rect">
-              <a:avLst/>
-            </a:prstGeom>
-            <a:noFill/>
-          </p:spPr>
-          <p:txBody>
-            <a:bodyPr wrap="square" anchor="ctr" lIns="38100" rIns="38100" tIns="25400" bIns="25400">
-              <a:spAutoFit/>
-            </a:bodyPr>
-            <a:lstStyle/>
-            <a:p>
-              <a:pPr algn="l"/>
-              <a:r>
-                <a:rPr sz="1800" b="1">
-                  <a:solidFill>
-                    <a:srgbClr val="1F3864"/>
-                  </a:solidFill>
-                  <a:latin typeface="Pretendard"/>
-                  <a:ea typeface="Pretendard"/>
-                  <a:cs typeface="Pretendard"/>
-                </a:rPr>
-                <a:t>순위 비교표 (종합 순위)</a:t>
-              </a:r>
-            </a:p>
-          </p:txBody>
-        </p:sp>
-        <p:sp>
-          <p:nvSpPr>
-            <p:cNvPr id="4" name="TextBox 3"/>
-            <p:cNvSpPr txBox="1"/>
-            <p:nvPr/>
-          </p:nvSpPr>
-          <p:spPr>
-            <a:xfrm>
-              <a:off x="502920" y="932688"/>
-              <a:ext cx="11155680" cy="292608"/>
-            </a:xfrm>
-            <a:prstGeom prst="rect">
-              <a:avLst/>
-            </a:prstGeom>
-            <a:noFill/>
-          </p:spPr>
-          <p:txBody>
-            <a:bodyPr wrap="square" anchor="ctr" lIns="38100" rIns="38100" tIns="25400" bIns="25400">
-              <a:spAutoFit/>
-            </a:bodyPr>
-            <a:lstStyle/>
-            <a:p>
-              <a:pPr algn="l"/>
-              <a:r>
-                <a:rPr sz="1100" b="0">
-                  <a:solidFill>
-                    <a:srgbClr val="595959"/>
-                  </a:solidFill>
-                  <a:latin typeface="Pretendard"/>
-                  <a:ea typeface="Pretendard"/>
-                  <a:cs typeface="Pretendard"/>
-                </a:rPr>
-                <a:t>종합 점수 기준 순위 뱃지 — 상위 3위 색상 강조</a:t>
-              </a:r>
-            </a:p>
-          </p:txBody>
-        </p:sp>
-        <p:graphicFrame>
-          <p:nvGraphicFramePr>
-            <p:cNvPr id="5" name="CMP-018_bg"/>
-            <p:cNvGraphicFramePr>
-              <a:graphicFrameLocks noGrp="1"/>
-            </p:cNvGraphicFramePr>
-            <p:nvPr/>
-          </p:nvGraphicFramePr>
-          <p:xfrm>
-            <a:off x="1463040" y="1554480"/>
-            <a:ext cx="9235440" cy="3401568"/>
-          </p:xfrm>
-          <a:graphic>
-            <a:graphicData uri="http://schemas.openxmlformats.org/drawingml/2006/table">
-              <a:tbl>
-                <a:tblPr>
-                  <a:tableStyleId>{5C22544A-7EE6-4342-B048-85BDC9FD1C3A}</a:tableStyleId>
-                </a:tblPr>
-                <a:tblGrid>
-                  <a:gridCol w="1280160"/>
-                  <a:gridCol w="4114800"/>
-                  <a:gridCol w="1920240"/>
-                  <a:gridCol w="1920240"/>
-                </a:tblGrid>
-                <a:tr h="566928">
-                  <a:tc>
-                    <a:txBody>
-                      <a:bodyPr wrap="square"/>
-                      <a:lstStyle/>
-                      <a:p>
-                        <a:pPr algn="ctr"/>
-                        <a:r>
-                          <a:rPr sz="1200" b="1">
-                            <a:solidFill>
-                              <a:srgbClr val="FFFFFF"/>
-                            </a:solidFill>
-                            <a:latin typeface="Pretendard"/>
-                            <a:ea typeface="Pretendard"/>
-                            <a:cs typeface="Pretendard"/>
-                          </a:rPr>
-                          <a:t>순위</a:t>
-                        </a:r>
-                      </a:p>
-                    </a:txBody>
-                    <a:tcPr anchor="ctr" marL="63500" marR="63500" marT="38100" marB="38100">
-                      <a:solidFill>
-                        <a:srgbClr val="1F3864"/>
-                      </a:solidFill>
-                    </a:tcPr>
-                  </a:tc>
-                  <a:tc>
-                    <a:txBody>
-                      <a:bodyPr wrap="square"/>
-                      <a:lstStyle/>
-                      <a:p>
-                        <a:pPr algn="l"/>
-                        <a:r>
-                          <a:rPr sz="1200" b="1">
-                            <a:solidFill>
-                              <a:srgbClr val="FFFFFF"/>
-                            </a:solidFill>
-                            <a:latin typeface="Pretendard"/>
-                            <a:ea typeface="Pretendard"/>
-                            <a:cs typeface="Pretendard"/>
-                          </a:rPr>
-                          <a:t>평가 대상</a:t>
-                        </a:r>
-                      </a:p>
-                    </a:txBody>
-                    <a:tcPr anchor="ctr" marL="63500" marR="63500" marT="38100" marB="38100">
-                      <a:solidFill>
-                        <a:srgbClr val="1F3864"/>
-                      </a:solidFill>
-                    </a:tcPr>
-                  </a:tc>
-                  <a:tc>
-                    <a:txBody>
-                      <a:bodyPr wrap="square"/>
-                      <a:lstStyle/>
-                      <a:p>
-                        <a:pPr algn="ctr"/>
-                        <a:r>
-                          <a:rPr sz="1200" b="1">
-                            <a:solidFill>
-                              <a:srgbClr val="FFFFFF"/>
-                            </a:solidFill>
-                            <a:latin typeface="Pretendard"/>
-                            <a:ea typeface="Pretendard"/>
-                            <a:cs typeface="Pretendard"/>
-                          </a:rPr>
-                          <a:t>종합 점수</a:t>
-                        </a:r>
-                      </a:p>
-                    </a:txBody>
-                    <a:tcPr anchor="ctr" marL="63500" marR="63500" marT="38100" marB="38100">
-                      <a:solidFill>
-                        <a:srgbClr val="1F3864"/>
-                      </a:solidFill>
-                    </a:tcPr>
-                  </a:tc>
-                  <a:tc>
-                    <a:txBody>
-                      <a:bodyPr wrap="square"/>
-                      <a:lstStyle/>
-                      <a:p>
-                        <a:pPr algn="ctr"/>
-                        <a:r>
-                          <a:rPr sz="1200" b="1">
-                            <a:solidFill>
-                              <a:srgbClr val="FFFFFF"/>
-                            </a:solidFill>
-                            <a:latin typeface="Pretendard"/>
-                            <a:ea typeface="Pretendard"/>
-                            <a:cs typeface="Pretendard"/>
-                          </a:rPr>
-                          <a:t>비고</a:t>
-                        </a:r>
-                      </a:p>
-                    </a:txBody>
-                    <a:tcPr anchor="ctr" marL="63500" marR="63500" marT="38100" marB="38100">
-                      <a:solidFill>
-                        <a:srgbClr val="1F3864"/>
-                      </a:solidFill>
-                    </a:tcPr>
-                  </a:tc>
-                </a:tr>
-                <a:tr h="566928">
-                  <a:tc>
-                    <a:txBody>
-                      <a:bodyPr wrap="square"/>
-                      <a:lstStyle/>
-                      <a:p>
-                        <a:pPr algn="ctr"/>
-                        <a:r>
-                          <a:rPr sz="1300" b="1">
-                            <a:solidFill>
-                              <a:srgbClr val="FFFFFF"/>
-                            </a:solidFill>
-                            <a:latin typeface="Pretendard"/>
-                            <a:ea typeface="Pretendard"/>
-                            <a:cs typeface="Pretendard"/>
-                          </a:rPr>
-                          <a:t>1위</a:t>
-                        </a:r>
-                      </a:p>
-                    </a:txBody>
-                    <a:tcPr anchor="ctr" marL="63500" marR="63500" marT="38100" marB="38100">
-                      <a:solidFill>
-                        <a:srgbClr val="2E75D6"/>
-                      </a:solidFill>
-                    </a:tcPr>
-                  </a:tc>
-                  <a:tc>
-                    <a:txBody>
-                      <a:bodyPr wrap="square"/>
-                      <a:lstStyle/>
-                      <a:p>
-                        <a:pPr algn="l"/>
-                        <a:r>
-                          <a:rPr sz="1100" b="1">
-                            <a:solidFill>
-                              <a:srgbClr val="222222"/>
-                            </a:solidFill>
-                            <a:latin typeface="Pretendard"/>
-                            <a:ea typeface="Pretendard"/>
-                            <a:cs typeface="Pretendard"/>
-                          </a:rPr>
-                          <a:t>자사 컨소시엄</a:t>
-                        </a:r>
-                      </a:p>
-                    </a:txBody>
-                    <a:tcPr anchor="ctr" marL="63500" marR="63500" marT="38100" marB="38100">
-                      <a:solidFill>
-                        <a:srgbClr val="FFFFFF"/>
-                      </a:solidFill>
-                    </a:tcPr>
-                  </a:tc>
-                  <a:tc>
-                    <a:txBody>
-                      <a:bodyPr wrap="square"/>
-                      <a:lstStyle/>
-                      <a:p>
-                        <a:pPr algn="ctr"/>
-                        <a:r>
-                          <a:rPr sz="1100" b="1">
-                            <a:solidFill>
-                              <a:srgbClr val="2E75D6"/>
-                            </a:solidFill>
-                            <a:latin typeface="Pretendard"/>
-                            <a:ea typeface="Pretendard"/>
-                            <a:cs typeface="Pretendard"/>
-                          </a:rPr>
-                          <a:t>88.3</a:t>
-                        </a:r>
-                      </a:p>
-                    </a:txBody>
-                    <a:tcPr anchor="ctr" marL="63500" marR="63500" marT="38100" marB="38100">
-                      <a:solidFill>
-                        <a:srgbClr val="FFFFFF"/>
-                      </a:solidFill>
-                    </a:tcPr>
-                  </a:tc>
-                  <a:tc>
-                    <a:txBody>
-                      <a:bodyPr wrap="square"/>
-                      <a:lstStyle/>
-                      <a:p>
-                        <a:pPr algn="ctr"/>
-                        <a:r>
-                          <a:rPr sz="1000" b="0">
-                            <a:solidFill>
-                              <a:srgbClr val="595959"/>
-                            </a:solidFill>
-                            <a:latin typeface="Pretendard"/>
-                            <a:ea typeface="Pretendard"/>
-                            <a:cs typeface="Pretendard"/>
-                          </a:rPr>
-                          <a:t>선정 우선</a:t>
-                        </a:r>
-                      </a:p>
-                    </a:txBody>
-                    <a:tcPr anchor="ctr" marL="63500" marR="63500" marT="38100" marB="38100">
-                      <a:solidFill>
-                        <a:srgbClr val="FFFFFF"/>
-                      </a:solidFill>
-                    </a:tcPr>
-                  </a:tc>
-                </a:tr>
-                <a:tr h="566928">
-                  <a:tc>
-                    <a:txBody>
-                      <a:bodyPr wrap="square"/>
-                      <a:lstStyle/>
-                      <a:p>
-                        <a:pPr algn="ctr"/>
-                        <a:r>
-                          <a:rPr sz="1300" b="1">
-                            <a:solidFill>
-                              <a:srgbClr val="FFFFFF"/>
-                            </a:solidFill>
-                            <a:latin typeface="Pretendard"/>
-                            <a:ea typeface="Pretendard"/>
-                            <a:cs typeface="Pretendard"/>
-                          </a:rPr>
-                          <a:t>2위</a:t>
-                        </a:r>
-                      </a:p>
-                    </a:txBody>
-                    <a:tcPr anchor="ctr" marL="63500" marR="63500" marT="38100" marB="38100">
-                      <a:solidFill>
-                        <a:srgbClr val="29ABE2"/>
-                      </a:solidFill>
-                    </a:tcPr>
-                  </a:tc>
-                  <a:tc>
-                    <a:txBody>
-                      <a:bodyPr wrap="square"/>
-                      <a:lstStyle/>
-                      <a:p>
-                        <a:pPr algn="l"/>
-                        <a:r>
-                          <a:rPr sz="1100" b="1">
-                            <a:solidFill>
-                              <a:srgbClr val="222222"/>
-                            </a:solidFill>
-                            <a:latin typeface="Pretendard"/>
-                            <a:ea typeface="Pretendard"/>
-                            <a:cs typeface="Pretendard"/>
-                          </a:rPr>
-                          <a:t>경쟁사 A</a:t>
-                        </a:r>
-                      </a:p>
-                    </a:txBody>
-                    <a:tcPr anchor="ctr" marL="63500" marR="63500" marT="38100" marB="38100">
-                      <a:solidFill>
-                        <a:srgbClr val="F2F2F2"/>
-                      </a:solidFill>
-                    </a:tcPr>
-                  </a:tc>
-                  <a:tc>
-                    <a:txBody>
-                      <a:bodyPr wrap="square"/>
-                      <a:lstStyle/>
-                      <a:p>
-                        <a:pPr algn="ctr"/>
-                        <a:r>
-                          <a:rPr sz="1100" b="1">
-                            <a:solidFill>
-                              <a:srgbClr val="2E75D6"/>
-                            </a:solidFill>
-                            <a:latin typeface="Pretendard"/>
-                            <a:ea typeface="Pretendard"/>
-                            <a:cs typeface="Pretendard"/>
-                          </a:rPr>
-                          <a:t>82.1</a:t>
-                        </a:r>
-                      </a:p>
-                    </a:txBody>
-                    <a:tcPr anchor="ctr" marL="63500" marR="63500" marT="38100" marB="38100">
-                      <a:solidFill>
-                        <a:srgbClr val="F2F2F2"/>
-                      </a:solidFill>
-                    </a:tcPr>
-                  </a:tc>
-                  <a:tc>
-                    <a:txBody>
-                      <a:bodyPr wrap="square"/>
-                      <a:lstStyle/>
-                      <a:p>
-                        <a:pPr algn="ctr"/>
-                        <a:r>
-                          <a:rPr sz="1000" b="0">
-                            <a:solidFill>
-                              <a:srgbClr val="595959"/>
-                            </a:solidFill>
-                            <a:latin typeface="Pretendard"/>
-                            <a:ea typeface="Pretendard"/>
-                            <a:cs typeface="Pretendard"/>
-                          </a:rPr>
-                          <a:t>차순위</a:t>
-                        </a:r>
-                      </a:p>
-                    </a:txBody>
-                    <a:tcPr anchor="ctr" marL="63500" marR="63500" marT="38100" marB="38100">
-                      <a:solidFill>
-                        <a:srgbClr val="F2F2F2"/>
-                      </a:solidFill>
-                    </a:tcPr>
-                  </a:tc>
-                </a:tr>
-                <a:tr h="566928">
-                  <a:tc>
-                    <a:txBody>
-                      <a:bodyPr wrap="square"/>
-                      <a:lstStyle/>
-                      <a:p>
-                        <a:pPr algn="ctr"/>
-                        <a:r>
-                          <a:rPr sz="1300" b="1">
-                            <a:solidFill>
-                              <a:srgbClr val="FFFFFF"/>
-                            </a:solidFill>
-                            <a:latin typeface="Pretendard"/>
-                            <a:ea typeface="Pretendard"/>
-                            <a:cs typeface="Pretendard"/>
-                          </a:rPr>
-                          <a:t>3위</a:t>
-                        </a:r>
-                      </a:p>
-                    </a:txBody>
-                    <a:tcPr anchor="ctr" marL="63500" marR="63500" marT="38100" marB="38100">
-                      <a:solidFill>
-                        <a:srgbClr val="1F9E8F"/>
-                      </a:solidFill>
-                    </a:tcPr>
-                  </a:tc>
-                  <a:tc>
-                    <a:txBody>
-                      <a:bodyPr wrap="square"/>
-                      <a:lstStyle/>
-                      <a:p>
-                        <a:pPr algn="l"/>
-                        <a:r>
-                          <a:rPr sz="1100" b="1">
-                            <a:solidFill>
-                              <a:srgbClr val="222222"/>
-                            </a:solidFill>
-                            <a:latin typeface="Pretendard"/>
-                            <a:ea typeface="Pretendard"/>
-                            <a:cs typeface="Pretendard"/>
-                          </a:rPr>
-                          <a:t>경쟁사 B</a:t>
-                        </a:r>
-                      </a:p>
-                    </a:txBody>
-                    <a:tcPr anchor="ctr" marL="63500" marR="63500" marT="38100" marB="38100">
-                      <a:solidFill>
-                        <a:srgbClr val="FFFFFF"/>
-                      </a:solidFill>
-                    </a:tcPr>
-                  </a:tc>
-                  <a:tc>
-                    <a:txBody>
-                      <a:bodyPr wrap="square"/>
-                      <a:lstStyle/>
-                      <a:p>
-                        <a:pPr algn="ctr"/>
-                        <a:r>
-                          <a:rPr sz="1100" b="1">
-                            <a:solidFill>
-                              <a:srgbClr val="2E75D6"/>
-                            </a:solidFill>
-                            <a:latin typeface="Pretendard"/>
-                            <a:ea typeface="Pretendard"/>
-                            <a:cs typeface="Pretendard"/>
-                          </a:rPr>
-                          <a:t>78.5</a:t>
-                        </a:r>
-                      </a:p>
-                    </a:txBody>
-                    <a:tcPr anchor="ctr" marL="63500" marR="63500" marT="38100" marB="38100">
-                      <a:solidFill>
-                        <a:srgbClr val="FFFFFF"/>
-                      </a:solidFill>
-                    </a:tcPr>
-                  </a:tc>
-                  <a:tc>
-                    <a:txBody>
-                      <a:bodyPr wrap="square"/>
-                      <a:lstStyle/>
-                      <a:p>
-                        <a:pPr algn="ctr"/>
-                        <a:r>
-                          <a:rPr sz="1000" b="0">
-                            <a:solidFill>
-                              <a:srgbClr val="595959"/>
-                            </a:solidFill>
-                            <a:latin typeface="Pretendard"/>
-                            <a:ea typeface="Pretendard"/>
-                            <a:cs typeface="Pretendard"/>
-                          </a:rPr>
-                          <a:t>예비</a:t>
-                        </a:r>
-                      </a:p>
-                    </a:txBody>
-                    <a:tcPr anchor="ctr" marL="63500" marR="63500" marT="38100" marB="38100">
-                      <a:solidFill>
-                        <a:srgbClr val="FFFFFF"/>
-                      </a:solidFill>
-                    </a:tcPr>
-                  </a:tc>
-                </a:tr>
-                <a:tr h="566928">
-                  <a:tc>
-                    <a:txBody>
-                      <a:bodyPr wrap="square"/>
-                      <a:lstStyle/>
-                      <a:p>
-                        <a:pPr algn="ctr"/>
-                        <a:r>
-                          <a:rPr sz="1100" b="1">
-                            <a:solidFill>
-                              <a:srgbClr val="595959"/>
-                            </a:solidFill>
-                            <a:latin typeface="Pretendard"/>
-                            <a:ea typeface="Pretendard"/>
-                            <a:cs typeface="Pretendard"/>
-                          </a:rPr>
-                          <a:t>4위</a:t>
-                        </a:r>
-                      </a:p>
-                    </a:txBody>
-                    <a:tcPr anchor="ctr" marL="63500" marR="63500" marT="38100" marB="38100">
-                      <a:solidFill>
-                        <a:srgbClr val="F2F2F2"/>
-                      </a:solidFill>
-                    </a:tcPr>
-                  </a:tc>
-                  <a:tc>
-                    <a:txBody>
-                      <a:bodyPr wrap="square"/>
-                      <a:lstStyle/>
-                      <a:p>
-                        <a:pPr algn="l"/>
-                        <a:r>
-                          <a:rPr sz="1100" b="0">
-                            <a:solidFill>
-                              <a:srgbClr val="222222"/>
-                            </a:solidFill>
-                            <a:latin typeface="Pretendard"/>
-                            <a:ea typeface="Pretendard"/>
-                            <a:cs typeface="Pretendard"/>
-                          </a:rPr>
-                          <a:t>경쟁사 C</a:t>
-                        </a:r>
-                      </a:p>
-                    </a:txBody>
-                    <a:tcPr anchor="ctr" marL="63500" marR="63500" marT="38100" marB="38100">
-                      <a:solidFill>
-                        <a:srgbClr val="F2F2F2"/>
-                      </a:solidFill>
-                    </a:tcPr>
-                  </a:tc>
-                  <a:tc>
-                    <a:txBody>
-                      <a:bodyPr wrap="square"/>
-                      <a:lstStyle/>
-                      <a:p>
-                        <a:pPr algn="ctr"/>
-                        <a:r>
-                          <a:rPr sz="1100" b="1">
-                            <a:solidFill>
-                              <a:srgbClr val="2E75D6"/>
-                            </a:solidFill>
-                            <a:latin typeface="Pretendard"/>
-                            <a:ea typeface="Pretendard"/>
-                            <a:cs typeface="Pretendard"/>
-                          </a:rPr>
-                          <a:t>71.2</a:t>
-                        </a:r>
-                      </a:p>
-                    </a:txBody>
-                    <a:tcPr anchor="ctr" marL="63500" marR="63500" marT="38100" marB="38100">
-                      <a:solidFill>
-                        <a:srgbClr val="F2F2F2"/>
-                      </a:solidFill>
-                    </a:tcPr>
-                  </a:tc>
-                  <a:tc>
-                    <a:txBody>
-                      <a:bodyPr wrap="square"/>
-                      <a:lstStyle/>
-                      <a:p>
-                        <a:pPr algn="ctr"/>
-                        <a:r>
-                          <a:rPr sz="1000" b="0">
-                            <a:solidFill>
-                              <a:srgbClr val="595959"/>
-                            </a:solidFill>
-                            <a:latin typeface="Pretendard"/>
-                            <a:ea typeface="Pretendard"/>
-                            <a:cs typeface="Pretendard"/>
-                          </a:rPr>
-                          <a:t>탈락</a:t>
-                        </a:r>
-                      </a:p>
-                    </a:txBody>
-                    <a:tcPr anchor="ctr" marL="63500" marR="63500" marT="38100" marB="38100">
-                      <a:solidFill>
-                        <a:srgbClr val="F2F2F2"/>
-                      </a:solidFill>
-                    </a:tcPr>
-                  </a:tc>
-                </a:tr>
-                <a:tr h="566928">
-                  <a:tc>
-                    <a:txBody>
-                      <a:bodyPr wrap="square"/>
-                      <a:lstStyle/>
-                      <a:p>
-                        <a:pPr algn="ctr"/>
-                        <a:r>
-                          <a:rPr sz="1100" b="1">
-                            <a:solidFill>
-                              <a:srgbClr val="595959"/>
-                            </a:solidFill>
-                            <a:latin typeface="Pretendard"/>
-                            <a:ea typeface="Pretendard"/>
-                            <a:cs typeface="Pretendard"/>
-                          </a:rPr>
-                          <a:t>5위</a:t>
-                        </a:r>
-                      </a:p>
-                    </a:txBody>
-                    <a:tcPr anchor="ctr" marL="63500" marR="63500" marT="38100" marB="38100">
-                      <a:solidFill>
-                        <a:srgbClr val="FFFFFF"/>
-                      </a:solidFill>
-                    </a:tcPr>
-                  </a:tc>
-                  <a:tc>
-                    <a:txBody>
-                      <a:bodyPr wrap="square"/>
-                      <a:lstStyle/>
-                      <a:p>
-                        <a:pPr algn="l"/>
-                        <a:r>
-                          <a:rPr sz="1100" b="0">
-                            <a:solidFill>
-                              <a:srgbClr val="222222"/>
-                            </a:solidFill>
-                            <a:latin typeface="Pretendard"/>
-                            <a:ea typeface="Pretendard"/>
-                            <a:cs typeface="Pretendard"/>
-                          </a:rPr>
-                          <a:t>경쟁사 D</a:t>
-                        </a:r>
-                      </a:p>
-                    </a:txBody>
-                    <a:tcPr anchor="ctr" marL="63500" marR="63500" marT="38100" marB="38100">
-                      <a:solidFill>
-                        <a:srgbClr val="FFFFFF"/>
-                      </a:solidFill>
-                    </a:tcPr>
-                  </a:tc>
-                  <a:tc>
-                    <a:txBody>
-                      <a:bodyPr wrap="square"/>
-                      <a:lstStyle/>
-                      <a:p>
-                        <a:pPr algn="ctr"/>
-                        <a:r>
-                          <a:rPr sz="1100" b="1">
-                            <a:solidFill>
-                              <a:srgbClr val="2E75D6"/>
-                            </a:solidFill>
-                            <a:latin typeface="Pretendard"/>
-                            <a:ea typeface="Pretendard"/>
-                            <a:cs typeface="Pretendard"/>
-                          </a:rPr>
-                          <a:t>65.9</a:t>
-                        </a:r>
-                      </a:p>
-                    </a:txBody>
-                    <a:tcPr anchor="ctr" marL="63500" marR="63500" marT="38100" marB="38100">
-                      <a:solidFill>
-                        <a:srgbClr val="FFFFFF"/>
-                      </a:solidFill>
-                    </a:tcPr>
-                  </a:tc>
-                  <a:tc>
-                    <a:txBody>
-                      <a:bodyPr wrap="square"/>
-                      <a:lstStyle/>
-                      <a:p>
-                        <a:pPr algn="ctr"/>
-                        <a:r>
-                          <a:rPr sz="1000" b="0">
-                            <a:solidFill>
-                              <a:srgbClr val="595959"/>
-                            </a:solidFill>
-                            <a:latin typeface="Pretendard"/>
-                            <a:ea typeface="Pretendard"/>
-                            <a:cs typeface="Pretendard"/>
-                          </a:rPr>
-                          <a:t>탈락</a:t>
-                        </a:r>
-                      </a:p>
-                    </a:txBody>
-                    <a:tcPr anchor="ctr" marL="63500" marR="63500" marT="38100" marB="38100">
-                      <a:solidFill>
-                        <a:srgbClr val="FFFFFF"/>
-                      </a:solidFill>
-                    </a:tcPr>
-                  </a:tc>
-                </a:tr>
-              </a:tbl>
-            </a:graphicData>
-          </a:graphic>
-        </p:graphicFrame>
-      </p:grpSp>
+          <a:prstGeom prst="rect">
+            <a:avLst/>
+          </a:prstGeom>
+          <a:noFill/>
+        </p:spPr>
+        <p:txBody>
+          <a:bodyPr wrap="square" anchor="ctr" lIns="38100" rIns="38100" tIns="25400" bIns="25400">
+            <a:spAutoFit/>
+          </a:bodyPr>
+          <a:lstStyle/>
+          <a:p>
+            <a:pPr algn="l"/>
+            <a:r>
+              <a:rPr sz="1800" b="1">
+                <a:solidFill>
+                  <a:srgbClr val="1F3864"/>
+                </a:solidFill>
+                <a:latin typeface="Pretendard"/>
+                <a:ea typeface="Pretendard"/>
+                <a:cs typeface="Pretendard"/>
+              </a:rPr>
+              <a:t>순위 비교표 (종합 순위)</a:t>
+            </a:r>
+          </a:p>
+        </p:txBody>
+      </p:sp>
+      <p:sp>
+        <p:nvSpPr>
+          <p:cNvPr id="4" name="TextBox 3"/>
+          <p:cNvSpPr txBox="1"/>
+          <p:nvPr/>
+        </p:nvSpPr>
+        <p:spPr>
+          <a:xfrm>
+            <a:off x="502920" y="932688"/>
+            <a:ext cx="11155680" cy="292608"/>
+          </a:xfrm>
+          <a:prstGeom prst="rect">
+            <a:avLst/>
+          </a:prstGeom>
+          <a:noFill/>
+        </p:spPr>
+        <p:txBody>
+          <a:bodyPr wrap="square" anchor="ctr" lIns="38100" rIns="38100" tIns="25400" bIns="25400">
+            <a:spAutoFit/>
+          </a:bodyPr>
+          <a:lstStyle/>
+          <a:p>
+            <a:pPr algn="l"/>
+            <a:r>
+              <a:rPr sz="1100" b="0">
+                <a:solidFill>
+                  <a:srgbClr val="595959"/>
+                </a:solidFill>
+                <a:latin typeface="Pretendard"/>
+                <a:ea typeface="Pretendard"/>
+                <a:cs typeface="Pretendard"/>
+              </a:rPr>
+              <a:t>종합 점수 기준 순위 뱃지 — 상위 3위 색상 강조</a:t>
+            </a:r>
+          </a:p>
+        </p:txBody>
+      </p:sp>
+      <p:graphicFrame>
+        <p:nvGraphicFramePr>
+          <p:cNvPr id="5" name="asset:CMP-018"/>
+          <p:cNvGraphicFramePr>
+            <a:graphicFrameLocks noGrp="1"/>
+          </p:cNvGraphicFramePr>
+          <p:nvPr/>
+        </p:nvGraphicFramePr>
+        <p:xfrm>
+          <a:off x="1463040" y="1554480"/>
+          <a:ext cx="9235440" cy="3401568"/>
+        </p:xfrm>
+        <a:graphic>
+          <a:graphicData uri="http://schemas.openxmlformats.org/drawingml/2006/table">
+            <a:tbl>
+              <a:tblPr>
+                <a:tableStyleId>{5C22544A-7EE6-4342-B048-85BDC9FD1C3A}</a:tableStyleId>
+              </a:tblPr>
+              <a:tblGrid>
+                <a:gridCol w="1280160"/>
+                <a:gridCol w="4114800"/>
+                <a:gridCol w="1920240"/>
+                <a:gridCol w="1920240"/>
+              </a:tblGrid>
+              <a:tr h="566928">
+                <a:tc>
+                  <a:txBody>
+                    <a:bodyPr wrap="square"/>
+                    <a:lstStyle/>
+                    <a:p>
+                      <a:pPr algn="ctr"/>
+                      <a:r>
+                        <a:rPr sz="1200" b="1">
+                          <a:solidFill>
+                            <a:srgbClr val="FFFFFF"/>
+                          </a:solidFill>
+                          <a:latin typeface="Pretendard"/>
+                          <a:ea typeface="Pretendard"/>
+                          <a:cs typeface="Pretendard"/>
+                        </a:rPr>
+                        <a:t>순위</a:t>
+                      </a:r>
+                    </a:p>
+                  </a:txBody>
+                  <a:tcPr anchor="ctr" marL="63500" marR="63500" marT="38100" marB="38100">
+                    <a:solidFill>
+                      <a:srgbClr val="1F3864"/>
+                    </a:solidFill>
+                  </a:tcPr>
+                </a:tc>
+                <a:tc>
+                  <a:txBody>
+                    <a:bodyPr wrap="square"/>
+                    <a:lstStyle/>
+                    <a:p>
+                      <a:pPr algn="l"/>
+                      <a:r>
+                        <a:rPr sz="1200" b="1">
+                          <a:solidFill>
+                            <a:srgbClr val="FFFFFF"/>
+                          </a:solidFill>
+                          <a:latin typeface="Pretendard"/>
+                          <a:ea typeface="Pretendard"/>
+                          <a:cs typeface="Pretendard"/>
+                        </a:rPr>
+                        <a:t>평가 대상</a:t>
+                      </a:r>
+                    </a:p>
+                  </a:txBody>
+                  <a:tcPr anchor="ctr" marL="63500" marR="63500" marT="38100" marB="38100">
+                    <a:solidFill>
+                      <a:srgbClr val="1F3864"/>
+                    </a:solidFill>
+                  </a:tcPr>
+                </a:tc>
+                <a:tc>
+                  <a:txBody>
+                    <a:bodyPr wrap="square"/>
+                    <a:lstStyle/>
+                    <a:p>
+                      <a:pPr algn="ctr"/>
+                      <a:r>
+                        <a:rPr sz="1200" b="1">
+                          <a:solidFill>
+                            <a:srgbClr val="FFFFFF"/>
+                          </a:solidFill>
+                          <a:latin typeface="Pretendard"/>
+                          <a:ea typeface="Pretendard"/>
+                          <a:cs typeface="Pretendard"/>
+                        </a:rPr>
+                        <a:t>종합 점수</a:t>
+                      </a:r>
+                    </a:p>
+                  </a:txBody>
+                  <a:tcPr anchor="ctr" marL="63500" marR="63500" marT="38100" marB="38100">
+                    <a:solidFill>
+                      <a:srgbClr val="1F3864"/>
+                    </a:solidFill>
+                  </a:tcPr>
+                </a:tc>
+                <a:tc>
+                  <a:txBody>
+                    <a:bodyPr wrap="square"/>
+                    <a:lstStyle/>
+                    <a:p>
+                      <a:pPr algn="ctr"/>
+                      <a:r>
+                        <a:rPr sz="1200" b="1">
+                          <a:solidFill>
+                            <a:srgbClr val="FFFFFF"/>
+                          </a:solidFill>
+                          <a:latin typeface="Pretendard"/>
+                          <a:ea typeface="Pretendard"/>
+                          <a:cs typeface="Pretendard"/>
+                        </a:rPr>
+                        <a:t>비고</a:t>
+                      </a:r>
+                    </a:p>
+                  </a:txBody>
+                  <a:tcPr anchor="ctr" marL="63500" marR="63500" marT="38100" marB="38100">
+                    <a:solidFill>
+                      <a:srgbClr val="1F3864"/>
+                    </a:solidFill>
+                  </a:tcPr>
+                </a:tc>
+              </a:tr>
+              <a:tr h="566928">
+                <a:tc>
+                  <a:txBody>
+                    <a:bodyPr wrap="square"/>
+                    <a:lstStyle/>
+                    <a:p>
+                      <a:pPr algn="ctr"/>
+                      <a:r>
+                        <a:rPr sz="1300" b="1">
+                          <a:solidFill>
+                            <a:srgbClr val="FFFFFF"/>
+                          </a:solidFill>
+                          <a:latin typeface="Pretendard"/>
+                          <a:ea typeface="Pretendard"/>
+                          <a:cs typeface="Pretendard"/>
+                        </a:rPr>
+                        <a:t>1위</a:t>
+                      </a:r>
+                    </a:p>
+                  </a:txBody>
+                  <a:tcPr anchor="ctr" marL="63500" marR="63500" marT="38100" marB="38100">
+                    <a:solidFill>
+                      <a:srgbClr val="2E75D6"/>
+                    </a:solidFill>
+                  </a:tcPr>
+                </a:tc>
+                <a:tc>
+                  <a:txBody>
+                    <a:bodyPr wrap="square"/>
+                    <a:lstStyle/>
+                    <a:p>
+                      <a:pPr algn="l"/>
+                      <a:r>
+                        <a:rPr sz="1100" b="1">
+                          <a:solidFill>
+                            <a:srgbClr val="222222"/>
+                          </a:solidFill>
+                          <a:latin typeface="Pretendard"/>
+                          <a:ea typeface="Pretendard"/>
+                          <a:cs typeface="Pretendard"/>
+                        </a:rPr>
+                        <a:t>자사 컨소시엄</a:t>
+                      </a:r>
+                    </a:p>
+                  </a:txBody>
+                  <a:tcPr anchor="ctr" marL="63500" marR="63500" marT="38100" marB="38100">
+                    <a:solidFill>
+                      <a:srgbClr val="FFFFFF"/>
+                    </a:solidFill>
+                  </a:tcPr>
+                </a:tc>
+                <a:tc>
+                  <a:txBody>
+                    <a:bodyPr wrap="square"/>
+                    <a:lstStyle/>
+                    <a:p>
+                      <a:pPr algn="ctr"/>
+                      <a:r>
+                        <a:rPr sz="1100" b="1">
+                          <a:solidFill>
+                            <a:srgbClr val="2E75D6"/>
+                          </a:solidFill>
+                          <a:latin typeface="Pretendard"/>
+                          <a:ea typeface="Pretendard"/>
+                          <a:cs typeface="Pretendard"/>
+                        </a:rPr>
+                        <a:t>88.3</a:t>
+                      </a:r>
+                    </a:p>
+                  </a:txBody>
+                  <a:tcPr anchor="ctr" marL="63500" marR="63500" marT="38100" marB="38100">
+                    <a:solidFill>
+                      <a:srgbClr val="FFFFFF"/>
+                    </a:solidFill>
+                  </a:tcPr>
+                </a:tc>
+                <a:tc>
+                  <a:txBody>
+                    <a:bodyPr wrap="square"/>
+                    <a:lstStyle/>
+                    <a:p>
+                      <a:pPr algn="ctr"/>
+                      <a:r>
+                        <a:rPr sz="1000" b="0">
+                          <a:solidFill>
+                            <a:srgbClr val="595959"/>
+                          </a:solidFill>
+                          <a:latin typeface="Pretendard"/>
+                          <a:ea typeface="Pretendard"/>
+                          <a:cs typeface="Pretendard"/>
+                        </a:rPr>
+                        <a:t>선정 우선</a:t>
+                      </a:r>
+                    </a:p>
+                  </a:txBody>
+                  <a:tcPr anchor="ctr" marL="63500" marR="63500" marT="38100" marB="38100">
+                    <a:solidFill>
+                      <a:srgbClr val="FFFFFF"/>
+                    </a:solidFill>
+                  </a:tcPr>
+                </a:tc>
+              </a:tr>
+              <a:tr h="566928">
+                <a:tc>
+                  <a:txBody>
+                    <a:bodyPr wrap="square"/>
+                    <a:lstStyle/>
+                    <a:p>
+                      <a:pPr algn="ctr"/>
+                      <a:r>
+                        <a:rPr sz="1300" b="1">
+                          <a:solidFill>
+                            <a:srgbClr val="FFFFFF"/>
+                          </a:solidFill>
+                          <a:latin typeface="Pretendard"/>
+                          <a:ea typeface="Pretendard"/>
+                          <a:cs typeface="Pretendard"/>
+                        </a:rPr>
+                        <a:t>2위</a:t>
+                      </a:r>
+                    </a:p>
+                  </a:txBody>
+                  <a:tcPr anchor="ctr" marL="63500" marR="63500" marT="38100" marB="38100">
+                    <a:solidFill>
+                      <a:srgbClr val="29ABE2"/>
+                    </a:solidFill>
+                  </a:tcPr>
+                </a:tc>
+                <a:tc>
+                  <a:txBody>
+                    <a:bodyPr wrap="square"/>
+                    <a:lstStyle/>
+                    <a:p>
+                      <a:pPr algn="l"/>
+                      <a:r>
+                        <a:rPr sz="1100" b="1">
+                          <a:solidFill>
+                            <a:srgbClr val="222222"/>
+                          </a:solidFill>
+                          <a:latin typeface="Pretendard"/>
+                          <a:ea typeface="Pretendard"/>
+                          <a:cs typeface="Pretendard"/>
+                        </a:rPr>
+                        <a:t>경쟁사 A</a:t>
+                      </a:r>
+                    </a:p>
+                  </a:txBody>
+                  <a:tcPr anchor="ctr" marL="63500" marR="63500" marT="38100" marB="38100">
+                    <a:solidFill>
+                      <a:srgbClr val="F2F2F2"/>
+                    </a:solidFill>
+                  </a:tcPr>
+                </a:tc>
+                <a:tc>
+                  <a:txBody>
+                    <a:bodyPr wrap="square"/>
+                    <a:lstStyle/>
+                    <a:p>
+                      <a:pPr algn="ctr"/>
+                      <a:r>
+                        <a:rPr sz="1100" b="1">
+                          <a:solidFill>
+                            <a:srgbClr val="2E75D6"/>
+                          </a:solidFill>
+                          <a:latin typeface="Pretendard"/>
+                          <a:ea typeface="Pretendard"/>
+                          <a:cs typeface="Pretendard"/>
+                        </a:rPr>
+                        <a:t>82.1</a:t>
+                      </a:r>
+                    </a:p>
+                  </a:txBody>
+                  <a:tcPr anchor="ctr" marL="63500" marR="63500" marT="38100" marB="38100">
+                    <a:solidFill>
+                      <a:srgbClr val="F2F2F2"/>
+                    </a:solidFill>
+                  </a:tcPr>
+                </a:tc>
+                <a:tc>
+                  <a:txBody>
+                    <a:bodyPr wrap="square"/>
+                    <a:lstStyle/>
+                    <a:p>
+                      <a:pPr algn="ctr"/>
+                      <a:r>
+                        <a:rPr sz="1000" b="0">
+                          <a:solidFill>
+                            <a:srgbClr val="595959"/>
+                          </a:solidFill>
+                          <a:latin typeface="Pretendard"/>
+                          <a:ea typeface="Pretendard"/>
+                          <a:cs typeface="Pretendard"/>
+                        </a:rPr>
+                        <a:t>차순위</a:t>
+                      </a:r>
+                    </a:p>
+                  </a:txBody>
+                  <a:tcPr anchor="ctr" marL="63500" marR="63500" marT="38100" marB="38100">
+                    <a:solidFill>
+                      <a:srgbClr val="F2F2F2"/>
+                    </a:solidFill>
+                  </a:tcPr>
+                </a:tc>
+              </a:tr>
+              <a:tr h="566928">
+                <a:tc>
+                  <a:txBody>
+                    <a:bodyPr wrap="square"/>
+                    <a:lstStyle/>
+                    <a:p>
+                      <a:pPr algn="ctr"/>
+                      <a:r>
+                        <a:rPr sz="1300" b="1">
+                          <a:solidFill>
+                            <a:srgbClr val="FFFFFF"/>
+                          </a:solidFill>
+                          <a:latin typeface="Pretendard"/>
+                          <a:ea typeface="Pretendard"/>
+                          <a:cs typeface="Pretendard"/>
+                        </a:rPr>
+                        <a:t>3위</a:t>
+                      </a:r>
+                    </a:p>
+                  </a:txBody>
+                  <a:tcPr anchor="ctr" marL="63500" marR="63500" marT="38100" marB="38100">
+                    <a:solidFill>
+                      <a:srgbClr val="1F9E8F"/>
+                    </a:solidFill>
+                  </a:tcPr>
+                </a:tc>
+                <a:tc>
+                  <a:txBody>
+                    <a:bodyPr wrap="square"/>
+                    <a:lstStyle/>
+                    <a:p>
+                      <a:pPr algn="l"/>
+                      <a:r>
+                        <a:rPr sz="1100" b="1">
+                          <a:solidFill>
+                            <a:srgbClr val="222222"/>
+                          </a:solidFill>
+                          <a:latin typeface="Pretendard"/>
+                          <a:ea typeface="Pretendard"/>
+                          <a:cs typeface="Pretendard"/>
+                        </a:rPr>
+                        <a:t>경쟁사 B</a:t>
+                      </a:r>
+                    </a:p>
+                  </a:txBody>
+                  <a:tcPr anchor="ctr" marL="63500" marR="63500" marT="38100" marB="38100">
+                    <a:solidFill>
+                      <a:srgbClr val="FFFFFF"/>
+                    </a:solidFill>
+                  </a:tcPr>
+                </a:tc>
+                <a:tc>
+                  <a:txBody>
+                    <a:bodyPr wrap="square"/>
+                    <a:lstStyle/>
+                    <a:p>
+                      <a:pPr algn="ctr"/>
+                      <a:r>
+                        <a:rPr sz="1100" b="1">
+                          <a:solidFill>
+                            <a:srgbClr val="2E75D6"/>
+                          </a:solidFill>
+                          <a:latin typeface="Pretendard"/>
+                          <a:ea typeface="Pretendard"/>
+                          <a:cs typeface="Pretendard"/>
+                        </a:rPr>
+                        <a:t>78.5</a:t>
+                      </a:r>
+                    </a:p>
+                  </a:txBody>
+                  <a:tcPr anchor="ctr" marL="63500" marR="63500" marT="38100" marB="38100">
+                    <a:solidFill>
+                      <a:srgbClr val="FFFFFF"/>
+                    </a:solidFill>
+                  </a:tcPr>
+                </a:tc>
+                <a:tc>
+                  <a:txBody>
+                    <a:bodyPr wrap="square"/>
+                    <a:lstStyle/>
+                    <a:p>
+                      <a:pPr algn="ctr"/>
+                      <a:r>
+                        <a:rPr sz="1000" b="0">
+                          <a:solidFill>
+                            <a:srgbClr val="595959"/>
+                          </a:solidFill>
+                          <a:latin typeface="Pretendard"/>
+                          <a:ea typeface="Pretendard"/>
+                          <a:cs typeface="Pretendard"/>
+                        </a:rPr>
+                        <a:t>예비</a:t>
+                      </a:r>
+                    </a:p>
+                  </a:txBody>
+                  <a:tcPr anchor="ctr" marL="63500" marR="63500" marT="38100" marB="38100">
+                    <a:solidFill>
+                      <a:srgbClr val="FFFFFF"/>
+                    </a:solidFill>
+                  </a:tcPr>
+                </a:tc>
+              </a:tr>
+              <a:tr h="566928">
+                <a:tc>
+                  <a:txBody>
+                    <a:bodyPr wrap="square"/>
+                    <a:lstStyle/>
+                    <a:p>
+                      <a:pPr algn="ctr"/>
+                      <a:r>
+                        <a:rPr sz="1100" b="1">
+                          <a:solidFill>
+                            <a:srgbClr val="595959"/>
+                          </a:solidFill>
+                          <a:latin typeface="Pretendard"/>
+                          <a:ea typeface="Pretendard"/>
+                          <a:cs typeface="Pretendard"/>
+                        </a:rPr>
+                        <a:t>4위</a:t>
+                      </a:r>
+                    </a:p>
+                  </a:txBody>
+                  <a:tcPr anchor="ctr" marL="63500" marR="63500" marT="38100" marB="38100">
+                    <a:solidFill>
+                      <a:srgbClr val="F2F2F2"/>
+                    </a:solidFill>
+                  </a:tcPr>
+                </a:tc>
+                <a:tc>
+                  <a:txBody>
+                    <a:bodyPr wrap="square"/>
+                    <a:lstStyle/>
+                    <a:p>
+                      <a:pPr algn="l"/>
+                      <a:r>
+                        <a:rPr sz="1100" b="0">
+                          <a:solidFill>
+                            <a:srgbClr val="222222"/>
+                          </a:solidFill>
+                          <a:latin typeface="Pretendard"/>
+                          <a:ea typeface="Pretendard"/>
+                          <a:cs typeface="Pretendard"/>
+                        </a:rPr>
+                        <a:t>경쟁사 C</a:t>
+                      </a:r>
+                    </a:p>
+                  </a:txBody>
+                  <a:tcPr anchor="ctr" marL="63500" marR="63500" marT="38100" marB="38100">
+                    <a:solidFill>
+                      <a:srgbClr val="F2F2F2"/>
+                    </a:solidFill>
+                  </a:tcPr>
+                </a:tc>
+                <a:tc>
+                  <a:txBody>
+                    <a:bodyPr wrap="square"/>
+                    <a:lstStyle/>
+                    <a:p>
+                      <a:pPr algn="ctr"/>
+                      <a:r>
+                        <a:rPr sz="1100" b="1">
+                          <a:solidFill>
+                            <a:srgbClr val="2E75D6"/>
+                          </a:solidFill>
+                          <a:latin typeface="Pretendard"/>
+                          <a:ea typeface="Pretendard"/>
+                          <a:cs typeface="Pretendard"/>
+                        </a:rPr>
+                        <a:t>71.2</a:t>
+                      </a:r>
+                    </a:p>
+                  </a:txBody>
+                  <a:tcPr anchor="ctr" marL="63500" marR="63500" marT="38100" marB="38100">
+                    <a:solidFill>
+                      <a:srgbClr val="F2F2F2"/>
+                    </a:solidFill>
+                  </a:tcPr>
+                </a:tc>
+                <a:tc>
+                  <a:txBody>
+                    <a:bodyPr wrap="square"/>
+                    <a:lstStyle/>
+                    <a:p>
+                      <a:pPr algn="ctr"/>
+                      <a:r>
+                        <a:rPr sz="1000" b="0">
+                          <a:solidFill>
+                            <a:srgbClr val="595959"/>
+                          </a:solidFill>
+                          <a:latin typeface="Pretendard"/>
+                          <a:ea typeface="Pretendard"/>
+                          <a:cs typeface="Pretendard"/>
+                        </a:rPr>
+                        <a:t>탈락</a:t>
+                      </a:r>
+                    </a:p>
+                  </a:txBody>
+                  <a:tcPr anchor="ctr" marL="63500" marR="63500" marT="38100" marB="38100">
+                    <a:solidFill>
+                      <a:srgbClr val="F2F2F2"/>
+                    </a:solidFill>
+                  </a:tcPr>
+                </a:tc>
+              </a:tr>
+              <a:tr h="566928">
+                <a:tc>
+                  <a:txBody>
+                    <a:bodyPr wrap="square"/>
+                    <a:lstStyle/>
+                    <a:p>
+                      <a:pPr algn="ctr"/>
+                      <a:r>
+                        <a:rPr sz="1100" b="1">
+                          <a:solidFill>
+                            <a:srgbClr val="595959"/>
+                          </a:solidFill>
+                          <a:latin typeface="Pretendard"/>
+                          <a:ea typeface="Pretendard"/>
+                          <a:cs typeface="Pretendard"/>
+                        </a:rPr>
+                        <a:t>5위</a:t>
+                      </a:r>
+                    </a:p>
+                  </a:txBody>
+                  <a:tcPr anchor="ctr" marL="63500" marR="63500" marT="38100" marB="38100">
+                    <a:solidFill>
+                      <a:srgbClr val="FFFFFF"/>
+                    </a:solidFill>
+                  </a:tcPr>
+                </a:tc>
+                <a:tc>
+                  <a:txBody>
+                    <a:bodyPr wrap="square"/>
+                    <a:lstStyle/>
+                    <a:p>
+                      <a:pPr algn="l"/>
+                      <a:r>
+                        <a:rPr sz="1100" b="0">
+                          <a:solidFill>
+                            <a:srgbClr val="222222"/>
+                          </a:solidFill>
+                          <a:latin typeface="Pretendard"/>
+                          <a:ea typeface="Pretendard"/>
+                          <a:cs typeface="Pretendard"/>
+                        </a:rPr>
+                        <a:t>경쟁사 D</a:t>
+                      </a:r>
+                    </a:p>
+                  </a:txBody>
+                  <a:tcPr anchor="ctr" marL="63500" marR="63500" marT="38100" marB="38100">
+                    <a:solidFill>
+                      <a:srgbClr val="FFFFFF"/>
+                    </a:solidFill>
+                  </a:tcPr>
+                </a:tc>
+                <a:tc>
+                  <a:txBody>
+                    <a:bodyPr wrap="square"/>
+                    <a:lstStyle/>
+                    <a:p>
+                      <a:pPr algn="ctr"/>
+                      <a:r>
+                        <a:rPr sz="1100" b="1">
+                          <a:solidFill>
+                            <a:srgbClr val="2E75D6"/>
+                          </a:solidFill>
+                          <a:latin typeface="Pretendard"/>
+                          <a:ea typeface="Pretendard"/>
+                          <a:cs typeface="Pretendard"/>
+                        </a:rPr>
+                        <a:t>65.9</a:t>
+                      </a:r>
+                    </a:p>
+                  </a:txBody>
+                  <a:tcPr anchor="ctr" marL="63500" marR="63500" marT="38100" marB="38100">
+                    <a:solidFill>
+                      <a:srgbClr val="FFFFFF"/>
+                    </a:solidFill>
+                  </a:tcPr>
+                </a:tc>
+                <a:tc>
+                  <a:txBody>
+                    <a:bodyPr wrap="square"/>
+                    <a:lstStyle/>
+                    <a:p>
+                      <a:pPr algn="ctr"/>
+                      <a:r>
+                        <a:rPr sz="1000" b="0">
+                          <a:solidFill>
+                            <a:srgbClr val="595959"/>
+                          </a:solidFill>
+                          <a:latin typeface="Pretendard"/>
+                          <a:ea typeface="Pretendard"/>
+                          <a:cs typeface="Pretendard"/>
+                        </a:rPr>
+                        <a:t>탈락</a:t>
+                      </a:r>
+                    </a:p>
+                  </a:txBody>
+                  <a:tcPr anchor="ctr" marL="63500" marR="63500" marT="38100" marB="38100">
+                    <a:solidFill>
+                      <a:srgbClr val="FFFFFF"/>
+                    </a:solidFill>
+                  </a:tcPr>
+                </a:tc>
+              </a:tr>
+            </a:tbl>
+          </a:graphicData>
+        </a:graphic>
+      </p:graphicFrame>
     </p:spTree>
   </p:cSld>
   <p:clrMapOvr>
